--- a/assets/figures-editable/c1-c2/c1-e23.pptx
+++ b/assets/figures-editable/c1-c2/c1-e23.pptx
@@ -7,7 +7,7 @@
   <p:sldIdLst>
     <p:sldId id="256" r:id="rId7"/>
   </p:sldIdLst>
-  <p:sldSz cx="11948160" cy="7924799" type="screen4x3"/>
+  <p:sldSz cx="12191695" cy="6858000" type="screen4x3"/>
   <p:notesSz cx="6858000" cy="9144000"/>
   <p:defaultTextStyle>
     <a:defPPr>
@@ -3098,14 +3098,14 @@
       <p:grpSpPr/>
       <p:sp>
         <p:nvSpPr>
-          <p:cNvPr id="2" name="text1" descr="sci-ppt:C1-E23-001"/>
+          <p:cNvPr id="2" name="C1-E23 text 0" descr="sci-ppt:o000"/>
           <p:cNvSpPr txBox="1"/>
           <p:nvPr/>
         </p:nvSpPr>
         <p:spPr>
           <a:xfrm>
-            <a:off x="316992" y="268224"/>
-            <a:ext cx="11277600" cy="359054"/>
+            <a:off x="274320" y="118872"/>
+            <a:ext cx="11612880" cy="340105"/>
           </a:xfrm>
           <a:prstGeom prst="rect">
             <a:avLst/>
@@ -3114,7 +3114,7 @@
           <a:effectLst/>
         </p:spPr>
         <p:txBody>
-          <a:bodyPr wrap="none" lIns="27432" rIns="27432" tIns="18288" bIns="18288" anchor="ctr">
+          <a:bodyPr wrap="none" lIns="18288" rIns="18288" tIns="18288" bIns="18288" anchor="t">
             <a:spAutoFit/>
           </a:bodyPr>
           <a:lstStyle/>
@@ -3125,35 +3125,1371 @@
               </a:spcAft>
             </a:pPr>
             <a:r>
-              <a:rPr sz="1823" b="0" i="0">
+              <a:rPr sz="1900" b="1" i="0">
                 <a:solidFill>
                   <a:srgbClr val="8EDBD4"/>
                 </a:solidFill>
                 <a:latin typeface="Arial"/>
               </a:rPr>
-              <a:t>C1-E23 | Physical-variable diagram</a:t>
-            </a:r>
-          </a:p>
-        </p:txBody>
-      </p:sp>
-      <p:sp>
-        <p:nvSpPr>
-          <p:cNvPr id="3" name="rect2" descr="sci-ppt:C1-E23-002"/>
+              <a:t>C1-E23 · Short-event reduced pressure-impulse model</a:t>
+            </a:r>
+          </a:p>
+        </p:txBody>
+      </p:sp>
+      <p:sp>
+        <p:nvSpPr>
+          <p:cNvPr id="3" name="C1-E23 polygon 1" descr="sci-ppt:o001"/>
           <p:cNvSpPr/>
           <p:nvPr/>
         </p:nvSpPr>
         <p:spPr>
           <a:xfrm>
-            <a:off x="1219200" y="2194560"/>
-            <a:ext cx="8290560" cy="1463040"/>
+            <a:off x="1005840" y="1097280"/>
+            <a:ext cx="4572000" cy="4572000"/>
+          </a:xfrm>
+          <a:custGeom>
+            <a:avLst/>
+            <a:gdLst/>
+            <a:ahLst/>
+            <a:cxnLst/>
+            <a:rect l="l" t="t" r="r" b="b"/>
+            <a:pathLst>
+              <a:path w="4572000" h="4572000">
+                <a:moveTo>
+                  <a:pt x="0" y="4572000"/>
+                </a:moveTo>
+                <a:lnTo>
+                  <a:pt x="4572000" y="4572000"/>
+                </a:lnTo>
+                <a:lnTo>
+                  <a:pt x="4568292" y="4387904"/>
+                </a:lnTo>
+                <a:lnTo>
+                  <a:pt x="4557174" y="4204106"/>
+                </a:lnTo>
+                <a:lnTo>
+                  <a:pt x="4538664" y="4020906"/>
+                </a:lnTo>
+                <a:lnTo>
+                  <a:pt x="4512793" y="3838599"/>
+                </a:lnTo>
+                <a:lnTo>
+                  <a:pt x="4479602" y="3657482"/>
+                </a:lnTo>
+                <a:lnTo>
+                  <a:pt x="4439145" y="3477848"/>
+                </a:lnTo>
+                <a:lnTo>
+                  <a:pt x="4391488" y="3299989"/>
+                </a:lnTo>
+                <a:lnTo>
+                  <a:pt x="4336708" y="3124193"/>
+                </a:lnTo>
+                <a:lnTo>
+                  <a:pt x="4274894" y="2950746"/>
+                </a:lnTo>
+                <a:lnTo>
+                  <a:pt x="4206146" y="2779928"/>
+                </a:lnTo>
+                <a:lnTo>
+                  <a:pt x="4130575" y="2612017"/>
+                </a:lnTo>
+                <a:lnTo>
+                  <a:pt x="4048304" y="2447285"/>
+                </a:lnTo>
+                <a:lnTo>
+                  <a:pt x="3959468" y="2286000"/>
+                </a:lnTo>
+                <a:lnTo>
+                  <a:pt x="3864209" y="2128422"/>
+                </a:lnTo>
+                <a:lnTo>
+                  <a:pt x="3762682" y="1974807"/>
+                </a:lnTo>
+                <a:lnTo>
+                  <a:pt x="3655052" y="1825406"/>
+                </a:lnTo>
+                <a:lnTo>
+                  <a:pt x="3541493" y="1680459"/>
+                </a:lnTo>
+                <a:lnTo>
+                  <a:pt x="3422191" y="1540203"/>
+                </a:lnTo>
+                <a:lnTo>
+                  <a:pt x="3297337" y="1404864"/>
+                </a:lnTo>
+                <a:lnTo>
+                  <a:pt x="3167135" y="1274662"/>
+                </a:lnTo>
+                <a:lnTo>
+                  <a:pt x="3031796" y="1149808"/>
+                </a:lnTo>
+                <a:lnTo>
+                  <a:pt x="2891540" y="1030506"/>
+                </a:lnTo>
+                <a:lnTo>
+                  <a:pt x="2746593" y="916947"/>
+                </a:lnTo>
+                <a:lnTo>
+                  <a:pt x="2597192" y="809317"/>
+                </a:lnTo>
+                <a:lnTo>
+                  <a:pt x="2443577" y="707790"/>
+                </a:lnTo>
+                <a:lnTo>
+                  <a:pt x="2286000" y="612531"/>
+                </a:lnTo>
+                <a:lnTo>
+                  <a:pt x="2124714" y="523695"/>
+                </a:lnTo>
+                <a:lnTo>
+                  <a:pt x="1959982" y="441424"/>
+                </a:lnTo>
+                <a:lnTo>
+                  <a:pt x="1792071" y="365853"/>
+                </a:lnTo>
+                <a:lnTo>
+                  <a:pt x="1621253" y="297105"/>
+                </a:lnTo>
+                <a:lnTo>
+                  <a:pt x="1447806" y="235291"/>
+                </a:lnTo>
+                <a:lnTo>
+                  <a:pt x="1272010" y="180511"/>
+                </a:lnTo>
+                <a:lnTo>
+                  <a:pt x="1094151" y="132854"/>
+                </a:lnTo>
+                <a:lnTo>
+                  <a:pt x="914517" y="92397"/>
+                </a:lnTo>
+                <a:lnTo>
+                  <a:pt x="733400" y="59206"/>
+                </a:lnTo>
+                <a:lnTo>
+                  <a:pt x="551093" y="33335"/>
+                </a:lnTo>
+                <a:lnTo>
+                  <a:pt x="367893" y="14825"/>
+                </a:lnTo>
+                <a:lnTo>
+                  <a:pt x="184095" y="3707"/>
+                </a:lnTo>
+                <a:lnTo>
+                  <a:pt x="0" y="0"/>
+                </a:lnTo>
+                <a:close/>
+              </a:path>
+            </a:pathLst>
+          </a:custGeom>
+          <a:solidFill>
+            <a:srgbClr val="1E4A5A"/>
+          </a:solidFill>
+          <a:ln w="17780">
+            <a:solidFill>
+              <a:srgbClr val="2B6678"/>
+            </a:solidFill>
+          </a:ln>
+          <a:effectLst/>
+        </p:spPr>
+        <p:txBody>
+          <a:bodyPr rtlCol="0" anchor="ctr"/>
+          <a:lstStyle/>
+          <a:p>
+            <a:pPr algn="ctr"/>
+          </a:p>
+        </p:txBody>
+      </p:sp>
+      <p:cxnSp>
+        <p:nvCxnSpPr>
+          <p:cNvPr id="4" name="C1-E23 line 2" descr="sci-ppt:o002"/>
+          <p:cNvCxnSpPr/>
+          <p:nvPr/>
+        </p:nvCxnSpPr>
+        <p:spPr>
+          <a:xfrm flipV="1">
+            <a:off x="1005840" y="4256454"/>
+            <a:ext cx="4348230" cy="1412826"/>
+          </a:xfrm>
+          <a:prstGeom prst="line">
+            <a:avLst/>
+          </a:prstGeom>
+          <a:ln w="13970">
+            <a:solidFill>
+              <a:srgbClr val="B4C7D2"/>
+            </a:solidFill>
+            <a:prstDash val="dash"/>
+          </a:ln>
+          <a:effectLst/>
+        </p:spPr>
+      </p:cxnSp>
+      <p:sp>
+        <p:nvSpPr>
+          <p:cNvPr id="5" name="C1-E23 text 3" descr="sci-ppt:o003"/>
+          <p:cNvSpPr txBox="1"/>
+          <p:nvPr/>
+        </p:nvSpPr>
+        <p:spPr>
+          <a:xfrm>
+            <a:off x="5397552" y="4150886"/>
+            <a:ext cx="914400" cy="208407"/>
           </a:xfrm>
           <a:prstGeom prst="rect">
+            <a:avLst/>
+          </a:prstGeom>
+          <a:noFill/>
+          <a:effectLst/>
+        </p:spPr>
+        <p:txBody>
+          <a:bodyPr wrap="none" lIns="18288" rIns="18288" tIns="18288" bIns="18288" anchor="t">
+            <a:spAutoFit/>
+          </a:bodyPr>
+          <a:lstStyle/>
+          <a:p>
+            <a:pPr algn="l">
+              <a:spcAft>
+                <a:spcPts val="0"/>
+              </a:spcAft>
+            </a:pPr>
+            <a:r>
+              <a:rPr sz="1050" b="0" i="0">
+                <a:solidFill>
+                  <a:srgbClr val="B4C7D2"/>
+                </a:solidFill>
+                <a:latin typeface="Arial"/>
+              </a:rPr>
+              <a:t>Π = 0.8 Π₀</a:t>
+            </a:r>
+          </a:p>
+        </p:txBody>
+      </p:sp>
+      <p:cxnSp>
+        <p:nvCxnSpPr>
+          <p:cNvPr id="6" name="C1-E23 line 4" descr="sci-ppt:o004"/>
+          <p:cNvCxnSpPr/>
+          <p:nvPr/>
+        </p:nvCxnSpPr>
+        <p:spPr>
+          <a:xfrm flipV="1">
+            <a:off x="1005840" y="2981925"/>
+            <a:ext cx="3698825" cy="2687355"/>
+          </a:xfrm>
+          <a:prstGeom prst="line">
+            <a:avLst/>
+          </a:prstGeom>
+          <a:ln w="13970">
+            <a:solidFill>
+              <a:srgbClr val="B4C7D2"/>
+            </a:solidFill>
+            <a:prstDash val="dash"/>
+          </a:ln>
+          <a:effectLst/>
+        </p:spPr>
+      </p:cxnSp>
+      <p:sp>
+        <p:nvSpPr>
+          <p:cNvPr id="7" name="C1-E23 text 5" descr="sci-ppt:o005"/>
+          <p:cNvSpPr txBox="1"/>
+          <p:nvPr/>
+        </p:nvSpPr>
+        <p:spPr>
+          <a:xfrm>
+            <a:off x="4741653" y="2863612"/>
+            <a:ext cx="914400" cy="208407"/>
+          </a:xfrm>
+          <a:prstGeom prst="rect">
+            <a:avLst/>
+          </a:prstGeom>
+          <a:noFill/>
+          <a:effectLst/>
+        </p:spPr>
+        <p:txBody>
+          <a:bodyPr wrap="none" lIns="18288" rIns="18288" tIns="18288" bIns="18288" anchor="t">
+            <a:spAutoFit/>
+          </a:bodyPr>
+          <a:lstStyle/>
+          <a:p>
+            <a:pPr algn="l">
+              <a:spcAft>
+                <a:spcPts val="0"/>
+              </a:spcAft>
+            </a:pPr>
+            <a:r>
+              <a:rPr sz="1050" b="0" i="0">
+                <a:solidFill>
+                  <a:srgbClr val="B4C7D2"/>
+                </a:solidFill>
+                <a:latin typeface="Arial"/>
+              </a:rPr>
+              <a:t>Π = 0.6 Π₀</a:t>
+            </a:r>
+          </a:p>
+        </p:txBody>
+      </p:sp>
+      <p:cxnSp>
+        <p:nvCxnSpPr>
+          <p:cNvPr id="8" name="C1-E23 line 6" descr="sci-ppt:o006"/>
+          <p:cNvCxnSpPr/>
+          <p:nvPr/>
+        </p:nvCxnSpPr>
+        <p:spPr>
+          <a:xfrm flipV="1">
+            <a:off x="1005840" y="1970454"/>
+            <a:ext cx="2687354" cy="3698826"/>
+          </a:xfrm>
+          <a:prstGeom prst="line">
+            <a:avLst/>
+          </a:prstGeom>
+          <a:ln w="13970">
+            <a:solidFill>
+              <a:srgbClr val="B4C7D2"/>
+            </a:solidFill>
+            <a:prstDash val="dash"/>
+          </a:ln>
+          <a:effectLst/>
+        </p:spPr>
+      </p:cxnSp>
+      <p:sp>
+        <p:nvSpPr>
+          <p:cNvPr id="9" name="C1-E23 text 7" descr="sci-ppt:o007"/>
+          <p:cNvSpPr txBox="1"/>
+          <p:nvPr/>
+        </p:nvSpPr>
+        <p:spPr>
+          <a:xfrm>
+            <a:off x="3720067" y="1842026"/>
+            <a:ext cx="914400" cy="208407"/>
+          </a:xfrm>
+          <a:prstGeom prst="rect">
+            <a:avLst/>
+          </a:prstGeom>
+          <a:noFill/>
+          <a:effectLst/>
+        </p:spPr>
+        <p:txBody>
+          <a:bodyPr wrap="none" lIns="18288" rIns="18288" tIns="18288" bIns="18288" anchor="t">
+            <a:spAutoFit/>
+          </a:bodyPr>
+          <a:lstStyle/>
+          <a:p>
+            <a:pPr algn="l">
+              <a:spcAft>
+                <a:spcPts val="0"/>
+              </a:spcAft>
+            </a:pPr>
+            <a:r>
+              <a:rPr sz="1050" b="0" i="0">
+                <a:solidFill>
+                  <a:srgbClr val="B4C7D2"/>
+                </a:solidFill>
+                <a:latin typeface="Arial"/>
+              </a:rPr>
+              <a:t>Π = 0.4 Π₀</a:t>
+            </a:r>
+          </a:p>
+        </p:txBody>
+      </p:sp>
+      <p:cxnSp>
+        <p:nvCxnSpPr>
+          <p:cNvPr id="10" name="C1-E23 line 8" descr="sci-ppt:o008"/>
+          <p:cNvCxnSpPr/>
+          <p:nvPr/>
+        </p:nvCxnSpPr>
+        <p:spPr>
+          <a:xfrm flipV="1">
+            <a:off x="1005840" y="1321049"/>
+            <a:ext cx="1412825" cy="4348231"/>
+          </a:xfrm>
+          <a:prstGeom prst="line">
+            <a:avLst/>
+          </a:prstGeom>
+          <a:ln w="13970">
+            <a:solidFill>
+              <a:srgbClr val="B4C7D2"/>
+            </a:solidFill>
+            <a:prstDash val="dash"/>
+          </a:ln>
+          <a:effectLst/>
+        </p:spPr>
+      </p:cxnSp>
+      <p:sp>
+        <p:nvSpPr>
+          <p:cNvPr id="11" name="C1-E23 text 9" descr="sci-ppt:o009"/>
+          <p:cNvSpPr txBox="1"/>
+          <p:nvPr/>
+        </p:nvSpPr>
+        <p:spPr>
+          <a:xfrm>
+            <a:off x="2432793" y="1186127"/>
+            <a:ext cx="914400" cy="208407"/>
+          </a:xfrm>
+          <a:prstGeom prst="rect">
+            <a:avLst/>
+          </a:prstGeom>
+          <a:noFill/>
+          <a:effectLst/>
+        </p:spPr>
+        <p:txBody>
+          <a:bodyPr wrap="none" lIns="18288" rIns="18288" tIns="18288" bIns="18288" anchor="t">
+            <a:spAutoFit/>
+          </a:bodyPr>
+          <a:lstStyle/>
+          <a:p>
+            <a:pPr algn="l">
+              <a:spcAft>
+                <a:spcPts val="0"/>
+              </a:spcAft>
+            </a:pPr>
+            <a:r>
+              <a:rPr sz="1050" b="0" i="0">
+                <a:solidFill>
+                  <a:srgbClr val="B4C7D2"/>
+                </a:solidFill>
+                <a:latin typeface="Arial"/>
+              </a:rPr>
+              <a:t>Π = 0.2 Π₀</a:t>
+            </a:r>
+          </a:p>
+        </p:txBody>
+      </p:sp>
+      <p:cxnSp>
+        <p:nvCxnSpPr>
+          <p:cNvPr id="12" name="C1-E23 line 10" descr="sci-ppt:o010"/>
+          <p:cNvCxnSpPr/>
+          <p:nvPr/>
+        </p:nvCxnSpPr>
+        <p:spPr>
+          <a:xfrm>
+            <a:off x="1005840" y="5669280"/>
+            <a:ext cx="4572000" cy="0"/>
+          </a:xfrm>
+          <a:prstGeom prst="line">
+            <a:avLst/>
+          </a:prstGeom>
+          <a:ln w="50800">
+            <a:solidFill>
+              <a:srgbClr val="F2B880"/>
+            </a:solidFill>
+          </a:ln>
+          <a:effectLst/>
+        </p:spPr>
+      </p:cxnSp>
+      <p:sp>
+        <p:nvSpPr>
+          <p:cNvPr id="13" name="C1-E23 text 11" descr="sci-ppt:o011"/>
+          <p:cNvSpPr txBox="1"/>
+          <p:nvPr/>
+        </p:nvSpPr>
+        <p:spPr>
+          <a:xfrm>
+            <a:off x="1920240" y="5742432"/>
+            <a:ext cx="2926080" cy="239395"/>
+          </a:xfrm>
+          <a:prstGeom prst="rect">
+            <a:avLst/>
+          </a:prstGeom>
+          <a:noFill/>
+          <a:effectLst/>
+        </p:spPr>
+        <p:txBody>
+          <a:bodyPr wrap="none" lIns="18288" rIns="18288" tIns="18288" bIns="18288" anchor="t">
+            <a:spAutoFit/>
+          </a:bodyPr>
+          <a:lstStyle/>
+          <a:p>
+            <a:pPr algn="l">
+              <a:spcAft>
+                <a:spcPts val="0"/>
+              </a:spcAft>
+            </a:pPr>
+            <a:r>
+              <a:rPr sz="1250" b="1" i="0">
+                <a:solidFill>
+                  <a:srgbClr val="F2B880"/>
+                </a:solidFill>
+                <a:latin typeface="Arial"/>
+              </a:rPr>
+              <a:t>driven boundary: Π = Π₀</a:t>
+            </a:r>
+          </a:p>
+        </p:txBody>
+      </p:sp>
+      <p:cxnSp>
+        <p:nvCxnSpPr>
+          <p:cNvPr id="14" name="C1-E23 line 12" descr="sci-ppt:o012"/>
+          <p:cNvCxnSpPr/>
+          <p:nvPr/>
+        </p:nvCxnSpPr>
+        <p:spPr>
+          <a:xfrm flipV="1">
+            <a:off x="1005840" y="1097280"/>
+            <a:ext cx="0" cy="4572000"/>
+          </a:xfrm>
+          <a:prstGeom prst="line">
+            <a:avLst/>
+          </a:prstGeom>
+          <a:ln w="50800">
+            <a:solidFill>
+              <a:srgbClr val="8EDBD4"/>
+            </a:solidFill>
+          </a:ln>
+          <a:effectLst/>
+        </p:spPr>
+      </p:cxnSp>
+      <p:sp>
+        <p:nvSpPr>
+          <p:cNvPr id="15" name="C1-E23 text 13" descr="sci-ppt:o013"/>
+          <p:cNvSpPr txBox="1"/>
+          <p:nvPr/>
+        </p:nvSpPr>
+        <p:spPr>
+          <a:xfrm>
+            <a:off x="1097280" y="777240"/>
+            <a:ext cx="3108960" cy="239395"/>
+          </a:xfrm>
+          <a:prstGeom prst="rect">
+            <a:avLst/>
+          </a:prstGeom>
+          <a:noFill/>
+          <a:effectLst/>
+        </p:spPr>
+        <p:txBody>
+          <a:bodyPr wrap="none" lIns="18288" rIns="18288" tIns="18288" bIns="18288" anchor="t">
+            <a:spAutoFit/>
+          </a:bodyPr>
+          <a:lstStyle/>
+          <a:p>
+            <a:pPr algn="l">
+              <a:spcAft>
+                <a:spcPts val="0"/>
+              </a:spcAft>
+            </a:pPr>
+            <a:r>
+              <a:rPr sz="1250" b="1" i="0">
+                <a:solidFill>
+                  <a:srgbClr val="8EDBD4"/>
+                </a:solidFill>
+                <a:latin typeface="Arial"/>
+              </a:rPr>
+              <a:t>free boundary: Π = 0</a:t>
+            </a:r>
+          </a:p>
+        </p:txBody>
+      </p:sp>
+      <p:sp>
+        <p:nvSpPr>
+          <p:cNvPr id="16" name="C1-E23 polygon 14" descr="sci-ppt:o014"/>
+          <p:cNvSpPr/>
+          <p:nvPr/>
+        </p:nvSpPr>
+        <p:spPr>
+          <a:xfrm>
+            <a:off x="1169815" y="4584321"/>
+            <a:ext cx="920983" cy="920983"/>
+          </a:xfrm>
+          <a:custGeom>
+            <a:avLst/>
+            <a:gdLst/>
+            <a:ahLst/>
+            <a:cxnLst/>
+            <a:rect l="l" t="t" r="r" b="b"/>
+            <a:pathLst>
+              <a:path w="920983" h="920983">
+                <a:moveTo>
+                  <a:pt x="920983" y="920983"/>
+                </a:moveTo>
+                <a:lnTo>
+                  <a:pt x="907598" y="848837"/>
+                </a:lnTo>
+                <a:lnTo>
+                  <a:pt x="889421" y="777748"/>
+                </a:lnTo>
+                <a:lnTo>
+                  <a:pt x="866534" y="708032"/>
+                </a:lnTo>
+                <a:lnTo>
+                  <a:pt x="839038" y="640001"/>
+                </a:lnTo>
+                <a:lnTo>
+                  <a:pt x="807057" y="573960"/>
+                </a:lnTo>
+                <a:lnTo>
+                  <a:pt x="770734" y="510205"/>
+                </a:lnTo>
+                <a:lnTo>
+                  <a:pt x="730231" y="449019"/>
+                </a:lnTo>
+                <a:lnTo>
+                  <a:pt x="685729" y="390678"/>
+                </a:lnTo>
+                <a:lnTo>
+                  <a:pt x="637427" y="335441"/>
+                </a:lnTo>
+                <a:lnTo>
+                  <a:pt x="585542" y="283556"/>
+                </a:lnTo>
+                <a:lnTo>
+                  <a:pt x="530305" y="235254"/>
+                </a:lnTo>
+                <a:lnTo>
+                  <a:pt x="471964" y="190752"/>
+                </a:lnTo>
+                <a:lnTo>
+                  <a:pt x="410778" y="150249"/>
+                </a:lnTo>
+                <a:lnTo>
+                  <a:pt x="347023" y="113926"/>
+                </a:lnTo>
+                <a:lnTo>
+                  <a:pt x="280982" y="81945"/>
+                </a:lnTo>
+                <a:lnTo>
+                  <a:pt x="212951" y="54449"/>
+                </a:lnTo>
+                <a:lnTo>
+                  <a:pt x="143235" y="31562"/>
+                </a:lnTo>
+                <a:lnTo>
+                  <a:pt x="72146" y="13385"/>
+                </a:lnTo>
+                <a:lnTo>
+                  <a:pt x="0" y="0"/>
+                </a:lnTo>
+              </a:path>
+            </a:pathLst>
+          </a:custGeom>
+          <a:noFill/>
+          <a:ln w="15240">
+            <a:solidFill>
+              <a:srgbClr val="F2B880">
+                <a:alpha val="70000"/>
+              </a:srgbClr>
+            </a:solidFill>
+          </a:ln>
+          <a:effectLst/>
+        </p:spPr>
+        <p:txBody>
+          <a:bodyPr rtlCol="0" anchor="ctr"/>
+          <a:lstStyle/>
+          <a:p>
+            <a:pPr algn="ctr"/>
+          </a:p>
+        </p:txBody>
+      </p:sp>
+      <p:cxnSp>
+        <p:nvCxnSpPr>
+          <p:cNvPr id="17" name="C1-E23 arrow 15" descr="sci-ppt:o015"/>
+          <p:cNvCxnSpPr/>
+          <p:nvPr/>
+        </p:nvCxnSpPr>
+        <p:spPr>
+          <a:xfrm flipH="1" flipV="1">
+            <a:off x="1240263" y="4443583"/>
+            <a:ext cx="460134" cy="376218"/>
+          </a:xfrm>
+          <a:prstGeom prst="line">
+            <a:avLst/>
+          </a:prstGeom>
+          <a:ln w="38100">
+            <a:solidFill>
+              <a:srgbClr val="F2B880"/>
+            </a:solidFill>
+            <a:headEnd type="none" w="med" len="med"/>
+            <a:tailEnd type="triangle" w="med" len="med"/>
+          </a:ln>
+          <a:effectLst/>
+        </p:spPr>
+      </p:cxnSp>
+      <p:sp>
+        <p:nvSpPr>
+          <p:cNvPr id="18" name="C1-E23 polygon 16" descr="sci-ppt:o016"/>
+          <p:cNvSpPr/>
+          <p:nvPr/>
+        </p:nvSpPr>
+        <p:spPr>
+          <a:xfrm>
+            <a:off x="1333790" y="3499362"/>
+            <a:ext cx="1841967" cy="1841967"/>
+          </a:xfrm>
+          <a:custGeom>
+            <a:avLst/>
+            <a:gdLst/>
+            <a:ahLst/>
+            <a:cxnLst/>
+            <a:rect l="l" t="t" r="r" b="b"/>
+            <a:pathLst>
+              <a:path w="1841967" h="1841967">
+                <a:moveTo>
+                  <a:pt x="1841967" y="1841967"/>
+                </a:moveTo>
+                <a:lnTo>
+                  <a:pt x="1815197" y="1697675"/>
+                </a:lnTo>
+                <a:lnTo>
+                  <a:pt x="1778843" y="1555496"/>
+                </a:lnTo>
+                <a:lnTo>
+                  <a:pt x="1733068" y="1416064"/>
+                </a:lnTo>
+                <a:lnTo>
+                  <a:pt x="1678077" y="1280003"/>
+                </a:lnTo>
+                <a:lnTo>
+                  <a:pt x="1614115" y="1147921"/>
+                </a:lnTo>
+                <a:lnTo>
+                  <a:pt x="1541468" y="1020410"/>
+                </a:lnTo>
+                <a:lnTo>
+                  <a:pt x="1460462" y="898039"/>
+                </a:lnTo>
+                <a:lnTo>
+                  <a:pt x="1371458" y="781356"/>
+                </a:lnTo>
+                <a:lnTo>
+                  <a:pt x="1274855" y="670882"/>
+                </a:lnTo>
+                <a:lnTo>
+                  <a:pt x="1171085" y="567112"/>
+                </a:lnTo>
+                <a:lnTo>
+                  <a:pt x="1060611" y="470509"/>
+                </a:lnTo>
+                <a:lnTo>
+                  <a:pt x="943928" y="381505"/>
+                </a:lnTo>
+                <a:lnTo>
+                  <a:pt x="821557" y="300499"/>
+                </a:lnTo>
+                <a:lnTo>
+                  <a:pt x="694046" y="227852"/>
+                </a:lnTo>
+                <a:lnTo>
+                  <a:pt x="561964" y="163890"/>
+                </a:lnTo>
+                <a:lnTo>
+                  <a:pt x="425903" y="108899"/>
+                </a:lnTo>
+                <a:lnTo>
+                  <a:pt x="286471" y="63124"/>
+                </a:lnTo>
+                <a:lnTo>
+                  <a:pt x="144292" y="26770"/>
+                </a:lnTo>
+                <a:lnTo>
+                  <a:pt x="0" y="0"/>
+                </a:lnTo>
+              </a:path>
+            </a:pathLst>
+          </a:custGeom>
+          <a:noFill/>
+          <a:ln w="15240">
+            <a:solidFill>
+              <a:srgbClr val="F2B880">
+                <a:alpha val="70000"/>
+              </a:srgbClr>
+            </a:solidFill>
+          </a:ln>
+          <a:effectLst/>
+        </p:spPr>
+        <p:txBody>
+          <a:bodyPr rtlCol="0" anchor="ctr"/>
+          <a:lstStyle/>
+          <a:p>
+            <a:pPr algn="ctr"/>
+          </a:p>
+        </p:txBody>
+      </p:sp>
+      <p:cxnSp>
+        <p:nvCxnSpPr>
+          <p:cNvPr id="19" name="C1-E23 arrow 17" descr="sci-ppt:o017"/>
+          <p:cNvCxnSpPr/>
+          <p:nvPr/>
+        </p:nvCxnSpPr>
+        <p:spPr>
+          <a:xfrm flipH="1" flipV="1">
+            <a:off x="2164888" y="3782214"/>
+            <a:ext cx="230067" cy="188109"/>
+          </a:xfrm>
+          <a:prstGeom prst="line">
+            <a:avLst/>
+          </a:prstGeom>
+          <a:ln w="38100">
+            <a:solidFill>
+              <a:srgbClr val="F2B880"/>
+            </a:solidFill>
+            <a:headEnd type="none" w="med" len="med"/>
+            <a:tailEnd type="triangle" w="med" len="med"/>
+          </a:ln>
+          <a:effectLst/>
+        </p:spPr>
+      </p:cxnSp>
+      <p:sp>
+        <p:nvSpPr>
+          <p:cNvPr id="20" name="C1-E23 polygon 18" descr="sci-ppt:o018"/>
+          <p:cNvSpPr/>
+          <p:nvPr/>
+        </p:nvSpPr>
+        <p:spPr>
+          <a:xfrm>
+            <a:off x="1497766" y="2414403"/>
+            <a:ext cx="2762950" cy="2762950"/>
+          </a:xfrm>
+          <a:custGeom>
+            <a:avLst/>
+            <a:gdLst/>
+            <a:ahLst/>
+            <a:cxnLst/>
+            <a:rect l="l" t="t" r="r" b="b"/>
+            <a:pathLst>
+              <a:path w="2762950" h="2762950">
+                <a:moveTo>
+                  <a:pt x="2762950" y="2762950"/>
+                </a:moveTo>
+                <a:lnTo>
+                  <a:pt x="2722795" y="2546513"/>
+                </a:lnTo>
+                <a:lnTo>
+                  <a:pt x="2668264" y="2333244"/>
+                </a:lnTo>
+                <a:lnTo>
+                  <a:pt x="2599602" y="2124096"/>
+                </a:lnTo>
+                <a:lnTo>
+                  <a:pt x="2517114" y="1920004"/>
+                </a:lnTo>
+                <a:lnTo>
+                  <a:pt x="2421171" y="1721882"/>
+                </a:lnTo>
+                <a:lnTo>
+                  <a:pt x="2312202" y="1530615"/>
+                </a:lnTo>
+                <a:lnTo>
+                  <a:pt x="2190692" y="1347059"/>
+                </a:lnTo>
+                <a:lnTo>
+                  <a:pt x="2057187" y="1172034"/>
+                </a:lnTo>
+                <a:lnTo>
+                  <a:pt x="1912282" y="1006323"/>
+                </a:lnTo>
+                <a:lnTo>
+                  <a:pt x="1756627" y="850668"/>
+                </a:lnTo>
+                <a:lnTo>
+                  <a:pt x="1590916" y="705763"/>
+                </a:lnTo>
+                <a:lnTo>
+                  <a:pt x="1415891" y="572258"/>
+                </a:lnTo>
+                <a:lnTo>
+                  <a:pt x="1232335" y="450748"/>
+                </a:lnTo>
+                <a:lnTo>
+                  <a:pt x="1041068" y="341779"/>
+                </a:lnTo>
+                <a:lnTo>
+                  <a:pt x="842946" y="245836"/>
+                </a:lnTo>
+                <a:lnTo>
+                  <a:pt x="638854" y="163348"/>
+                </a:lnTo>
+                <a:lnTo>
+                  <a:pt x="429706" y="94686"/>
+                </a:lnTo>
+                <a:lnTo>
+                  <a:pt x="216437" y="40155"/>
+                </a:lnTo>
+                <a:lnTo>
+                  <a:pt x="0" y="0"/>
+                </a:lnTo>
+              </a:path>
+            </a:pathLst>
+          </a:custGeom>
+          <a:noFill/>
+          <a:ln w="15240">
+            <a:solidFill>
+              <a:srgbClr val="F2B880">
+                <a:alpha val="70000"/>
+              </a:srgbClr>
+            </a:solidFill>
+          </a:ln>
+          <a:effectLst/>
+        </p:spPr>
+        <p:txBody>
+          <a:bodyPr rtlCol="0" anchor="ctr"/>
+          <a:lstStyle/>
+          <a:p>
+            <a:pPr algn="ctr"/>
+          </a:p>
+        </p:txBody>
+      </p:sp>
+      <p:cxnSp>
+        <p:nvCxnSpPr>
+          <p:cNvPr id="21" name="C1-E23 arrow 19" descr="sci-ppt:o019"/>
+          <p:cNvCxnSpPr/>
+          <p:nvPr/>
+        </p:nvCxnSpPr>
+        <p:spPr>
+          <a:xfrm flipH="1" flipV="1">
+            <a:off x="2936135" y="2995439"/>
+            <a:ext cx="153378" cy="125406"/>
+          </a:xfrm>
+          <a:prstGeom prst="line">
+            <a:avLst/>
+          </a:prstGeom>
+          <a:ln w="38100">
+            <a:solidFill>
+              <a:srgbClr val="F2B880"/>
+            </a:solidFill>
+            <a:headEnd type="none" w="med" len="med"/>
+            <a:tailEnd type="triangle" w="med" len="med"/>
+          </a:ln>
+          <a:effectLst/>
+        </p:spPr>
+      </p:cxnSp>
+      <p:sp>
+        <p:nvSpPr>
+          <p:cNvPr id="22" name="C1-E23 text 20" descr="sci-ppt:o020"/>
+          <p:cNvSpPr txBox="1"/>
+          <p:nvPr/>
+        </p:nvSpPr>
+        <p:spPr>
+          <a:xfrm>
+            <a:off x="6858000" y="1005840"/>
+            <a:ext cx="4937760" cy="278130"/>
+          </a:xfrm>
+          <a:prstGeom prst="rect">
+            <a:avLst/>
+          </a:prstGeom>
+          <a:noFill/>
+          <a:effectLst/>
+        </p:spPr>
+        <p:txBody>
+          <a:bodyPr wrap="none" lIns="18288" rIns="18288" tIns="18288" bIns="18288" anchor="t">
+            <a:spAutoFit/>
+          </a:bodyPr>
+          <a:lstStyle/>
+          <a:p>
+            <a:pPr algn="l">
+              <a:spcAft>
+                <a:spcPts val="0"/>
+              </a:spcAft>
+            </a:pPr>
+            <a:r>
+              <a:rPr sz="1500" b="1" i="0">
+                <a:solidFill>
+                  <a:srgbClr val="8EDBD4"/>
+                </a:solidFill>
+                <a:latin typeface="Arial"/>
+              </a:rPr>
+              <a:t>Reduced model: ∇²Π = 0</a:t>
+            </a:r>
+          </a:p>
+        </p:txBody>
+      </p:sp>
+      <p:sp>
+        <p:nvSpPr>
+          <p:cNvPr id="23" name="C1-E23 text 21" descr="sci-ppt:o021"/>
+          <p:cNvSpPr txBox="1"/>
+          <p:nvPr/>
+        </p:nvSpPr>
+        <p:spPr>
+          <a:xfrm>
+            <a:off x="7059168" y="1508760"/>
+            <a:ext cx="4736592" cy="433070"/>
+          </a:xfrm>
+          <a:prstGeom prst="rect">
+            <a:avLst/>
+          </a:prstGeom>
+          <a:noFill/>
+          <a:effectLst/>
+        </p:spPr>
+        <p:txBody>
+          <a:bodyPr wrap="none" lIns="18288" rIns="18288" tIns="18288" bIns="18288" anchor="t">
+            <a:spAutoFit/>
+          </a:bodyPr>
+          <a:lstStyle/>
+          <a:p>
+            <a:pPr algn="l">
+              <a:spcAft>
+                <a:spcPts val="0"/>
+              </a:spcAft>
+            </a:pPr>
+            <a:r>
+              <a:rPr sz="1250" b="0" i="0">
+                <a:solidFill>
+                  <a:srgbClr val="E7F0F3"/>
+                </a:solidFill>
+                <a:latin typeface="Arial"/>
+              </a:rPr>
+              <a:t>Incompressible short event: ∇·Δu = 0 and Δu ≃ −∇Π/ρ give</a:t>
+            </a:r>
+          </a:p>
+          <a:p>
+            <a:pPr algn="l">
+              <a:spcAft>
+                <a:spcPts val="0"/>
+              </a:spcAft>
+            </a:pPr>
+            <a:r>
+              <a:rPr sz="1250" b="0" i="0">
+                <a:solidFill>
+                  <a:srgbClr val="E7F0F3"/>
+                </a:solidFill>
+                <a:latin typeface="Arial"/>
+              </a:rPr>
+              <a:t>Laplace's equation for Π.</a:t>
+            </a:r>
+          </a:p>
+        </p:txBody>
+      </p:sp>
+      <p:sp>
+        <p:nvSpPr>
+          <p:cNvPr id="24" name="C1-E23 ellipse 22" descr="sci-ppt:o022"/>
+          <p:cNvSpPr/>
+          <p:nvPr/>
+        </p:nvSpPr>
+        <p:spPr>
+          <a:xfrm>
+            <a:off x="6890004" y="1566037"/>
+            <a:ext cx="82296" cy="82296"/>
+          </a:xfrm>
+          <a:prstGeom prst="ellipse">
+            <a:avLst/>
+          </a:prstGeom>
+          <a:solidFill>
+            <a:srgbClr val="8EDBD4"/>
+          </a:solidFill>
+          <a:ln w="12700">
+            <a:solidFill>
+              <a:srgbClr val="8EDBD4"/>
+            </a:solidFill>
+          </a:ln>
+          <a:effectLst/>
+        </p:spPr>
+        <p:txBody>
+          <a:bodyPr rtlCol="0" anchor="ctr"/>
+          <a:lstStyle/>
+          <a:p>
+            <a:pPr algn="ctr"/>
+          </a:p>
+        </p:txBody>
+      </p:sp>
+      <p:sp>
+        <p:nvSpPr>
+          <p:cNvPr id="25" name="C1-E23 text 23" descr="sci-ppt:o023"/>
+          <p:cNvSpPr txBox="1"/>
+          <p:nvPr/>
+        </p:nvSpPr>
+        <p:spPr>
+          <a:xfrm>
+            <a:off x="7059168" y="1987549"/>
+            <a:ext cx="4736592" cy="626745"/>
+          </a:xfrm>
+          <a:prstGeom prst="rect">
+            <a:avLst/>
+          </a:prstGeom>
+          <a:noFill/>
+          <a:effectLst/>
+        </p:spPr>
+        <p:txBody>
+          <a:bodyPr wrap="none" lIns="18288" rIns="18288" tIns="18288" bIns="18288" anchor="t">
+            <a:spAutoFit/>
+          </a:bodyPr>
+          <a:lstStyle/>
+          <a:p>
+            <a:pPr algn="l">
+              <a:spcAft>
+                <a:spcPts val="0"/>
+              </a:spcAft>
+            </a:pPr>
+            <a:r>
+              <a:rPr sz="1250" b="0" i="0">
+                <a:solidFill>
+                  <a:srgbClr val="E7F0F3"/>
+                </a:solidFill>
+                <a:latin typeface="Arial"/>
+              </a:rPr>
+              <a:t>Π is fixed on the boundaries (Π₀ on the driven wall, 0</a:t>
+            </a:r>
+          </a:p>
+          <a:p>
+            <a:pPr algn="l">
+              <a:spcAft>
+                <a:spcPts val="0"/>
+              </a:spcAft>
+            </a:pPr>
+            <a:r>
+              <a:rPr sz="1250" b="0" i="0">
+                <a:solidFill>
+                  <a:srgbClr val="E7F0F3"/>
+                </a:solidFill>
+                <a:latin typeface="Arial"/>
+              </a:rPr>
+              <a:t>at the free surface); the interior follows from geometry</a:t>
+            </a:r>
+          </a:p>
+          <a:p>
+            <a:pPr algn="l">
+              <a:spcAft>
+                <a:spcPts val="0"/>
+              </a:spcAft>
+            </a:pPr>
+            <a:r>
+              <a:rPr sz="1250" b="0" i="0">
+                <a:solidFill>
+                  <a:srgbClr val="E7F0F3"/>
+                </a:solidFill>
+                <a:latin typeface="Arial"/>
+              </a:rPr>
+              <a:t>alone.</a:t>
+            </a:r>
+          </a:p>
+        </p:txBody>
+      </p:sp>
+      <p:sp>
+        <p:nvSpPr>
+          <p:cNvPr id="26" name="C1-E23 ellipse 24" descr="sci-ppt:o024"/>
+          <p:cNvSpPr/>
+          <p:nvPr/>
+        </p:nvSpPr>
+        <p:spPr>
+          <a:xfrm>
+            <a:off x="6890004" y="2044826"/>
+            <a:ext cx="82296" cy="82296"/>
+          </a:xfrm>
+          <a:prstGeom prst="ellipse">
+            <a:avLst/>
+          </a:prstGeom>
+          <a:solidFill>
+            <a:srgbClr val="8EDBD4"/>
+          </a:solidFill>
+          <a:ln w="12700">
+            <a:solidFill>
+              <a:srgbClr val="8EDBD4"/>
+            </a:solidFill>
+          </a:ln>
+          <a:effectLst/>
+        </p:spPr>
+        <p:txBody>
+          <a:bodyPr rtlCol="0" anchor="ctr"/>
+          <a:lstStyle/>
+          <a:p>
+            <a:pPr algn="ctr"/>
+          </a:p>
+        </p:txBody>
+      </p:sp>
+      <p:sp>
+        <p:nvSpPr>
+          <p:cNvPr id="27" name="C1-E23 text 25" descr="sci-ppt:o025"/>
+          <p:cNvSpPr txBox="1"/>
+          <p:nvPr/>
+        </p:nvSpPr>
+        <p:spPr>
+          <a:xfrm>
+            <a:off x="7059168" y="2660014"/>
+            <a:ext cx="4736592" cy="626745"/>
+          </a:xfrm>
+          <a:prstGeom prst="rect">
+            <a:avLst/>
+          </a:prstGeom>
+          <a:noFill/>
+          <a:effectLst/>
+        </p:spPr>
+        <p:txBody>
+          <a:bodyPr wrap="none" lIns="18288" rIns="18288" tIns="18288" bIns="18288" anchor="t">
+            <a:spAutoFit/>
+          </a:bodyPr>
+          <a:lstStyle/>
+          <a:p>
+            <a:pPr algn="l">
+              <a:spcAft>
+                <a:spcPts val="0"/>
+              </a:spcAft>
+            </a:pPr>
+            <a:r>
+              <a:rPr sz="1250" b="0" i="0">
+                <a:solidFill>
+                  <a:srgbClr val="E7F0F3"/>
+                </a:solidFill>
+                <a:latin typeface="Arial"/>
+              </a:rPr>
+              <a:t>Here Π = Π₀(1 − θ/θ₀) in a right-angle corner is</a:t>
+            </a:r>
+          </a:p>
+          <a:p>
+            <a:pPr algn="l">
+              <a:spcAft>
+                <a:spcPts val="0"/>
+              </a:spcAft>
+            </a:pPr>
+            <a:r>
+              <a:rPr sz="1250" b="0" i="0">
+                <a:solidFill>
+                  <a:srgbClr val="E7F0F3"/>
+                </a:solidFill>
+                <a:latin typeface="Arial"/>
+              </a:rPr>
+              <a:t>harmonic, so Δu points along circular arcs toward the</a:t>
+            </a:r>
+          </a:p>
+          <a:p>
+            <a:pPr algn="l">
+              <a:spcAft>
+                <a:spcPts val="0"/>
+              </a:spcAft>
+            </a:pPr>
+            <a:r>
+              <a:rPr sz="1250" b="0" i="0">
+                <a:solidFill>
+                  <a:srgbClr val="E7F0F3"/>
+                </a:solidFill>
+                <a:latin typeface="Arial"/>
+              </a:rPr>
+              <a:t>free side.</a:t>
+            </a:r>
+          </a:p>
+        </p:txBody>
+      </p:sp>
+      <p:sp>
+        <p:nvSpPr>
+          <p:cNvPr id="28" name="C1-E23 ellipse 26" descr="sci-ppt:o026"/>
+          <p:cNvSpPr/>
+          <p:nvPr/>
+        </p:nvSpPr>
+        <p:spPr>
+          <a:xfrm>
+            <a:off x="6890004" y="2717291"/>
+            <a:ext cx="82296" cy="82296"/>
+          </a:xfrm>
+          <a:prstGeom prst="ellipse">
+            <a:avLst/>
+          </a:prstGeom>
+          <a:solidFill>
+            <a:srgbClr val="8EDBD4"/>
+          </a:solidFill>
+          <a:ln w="12700">
+            <a:solidFill>
+              <a:srgbClr val="8EDBD4"/>
+            </a:solidFill>
+          </a:ln>
+          <a:effectLst/>
+        </p:spPr>
+        <p:txBody>
+          <a:bodyPr rtlCol="0" anchor="ctr"/>
+          <a:lstStyle/>
+          <a:p>
+            <a:pPr algn="ctr"/>
+          </a:p>
+        </p:txBody>
+      </p:sp>
+      <p:sp>
+        <p:nvSpPr>
+          <p:cNvPr id="29" name="C1-E23 text 27" descr="sci-ppt:o027"/>
+          <p:cNvSpPr txBox="1"/>
+          <p:nvPr/>
+        </p:nvSpPr>
+        <p:spPr>
+          <a:xfrm>
+            <a:off x="7059168" y="3332479"/>
+            <a:ext cx="4736592" cy="433070"/>
+          </a:xfrm>
+          <a:prstGeom prst="rect">
+            <a:avLst/>
+          </a:prstGeom>
+          <a:noFill/>
+          <a:effectLst/>
+        </p:spPr>
+        <p:txBody>
+          <a:bodyPr wrap="none" lIns="18288" rIns="18288" tIns="18288" bIns="18288" anchor="t">
+            <a:spAutoFit/>
+          </a:bodyPr>
+          <a:lstStyle/>
+          <a:p>
+            <a:pPr algn="l">
+              <a:spcAft>
+                <a:spcPts val="0"/>
+              </a:spcAft>
+            </a:pPr>
+            <a:r>
+              <a:rPr sz="1250" b="0" i="0">
+                <a:solidFill>
+                  <a:srgbClr val="E7F0F3"/>
+                </a:solidFill>
+                <a:latin typeface="Arial"/>
+              </a:rPr>
+              <a:t>Arrow length ∝ 1/r: the impulse gradient is steepest</a:t>
+            </a:r>
+          </a:p>
+          <a:p>
+            <a:pPr algn="l">
+              <a:spcAft>
+                <a:spcPts val="0"/>
+              </a:spcAft>
+            </a:pPr>
+            <a:r>
+              <a:rPr sz="1250" b="0" i="0">
+                <a:solidFill>
+                  <a:srgbClr val="E7F0F3"/>
+                </a:solidFill>
+                <a:latin typeface="Arial"/>
+              </a:rPr>
+              <a:t>near the corner.</a:t>
+            </a:r>
+          </a:p>
+        </p:txBody>
+      </p:sp>
+      <p:sp>
+        <p:nvSpPr>
+          <p:cNvPr id="30" name="C1-E23 ellipse 28" descr="sci-ppt:o028"/>
+          <p:cNvSpPr/>
+          <p:nvPr/>
+        </p:nvSpPr>
+        <p:spPr>
+          <a:xfrm>
+            <a:off x="6890004" y="3389756"/>
+            <a:ext cx="82296" cy="82296"/>
+          </a:xfrm>
+          <a:prstGeom prst="ellipse">
+            <a:avLst/>
+          </a:prstGeom>
+          <a:solidFill>
+            <a:srgbClr val="8EDBD4"/>
+          </a:solidFill>
+          <a:ln w="12700">
+            <a:solidFill>
+              <a:srgbClr val="8EDBD4"/>
+            </a:solidFill>
+          </a:ln>
+          <a:effectLst/>
+        </p:spPr>
+        <p:txBody>
+          <a:bodyPr rtlCol="0" anchor="ctr"/>
+          <a:lstStyle/>
+          <a:p>
+            <a:pPr algn="ctr"/>
+          </a:p>
+        </p:txBody>
+      </p:sp>
+      <p:sp>
+        <p:nvSpPr>
+          <p:cNvPr id="31" name="C1-E23 round_rect 29" descr="sci-ppt:o029"/>
+          <p:cNvSpPr/>
+          <p:nvPr/>
+        </p:nvSpPr>
+        <p:spPr>
+          <a:xfrm>
+            <a:off x="6858000" y="4572000"/>
+            <a:ext cx="4937760" cy="1600200"/>
+          </a:xfrm>
+          <a:prstGeom prst="roundRect">
             <a:avLst/>
           </a:prstGeom>
           <a:solidFill>
             <a:srgbClr val="213E4B"/>
           </a:solidFill>
-          <a:ln w="19050">
+          <a:ln w="20320">
             <a:solidFill>
               <a:srgbClr val="B4C7D2"/>
             </a:solidFill>
@@ -3168,84 +4504,16 @@
           </a:p>
         </p:txBody>
       </p:sp>
-      <p:cxnSp>
-        <p:nvCxnSpPr>
-          <p:cNvPr id="4" name="line3" descr="sci-ppt:C1-E23-003"/>
-          <p:cNvCxnSpPr/>
-          <p:nvPr/>
-        </p:nvCxnSpPr>
-        <p:spPr>
-          <a:xfrm>
-            <a:off x="1219200" y="2194560"/>
-            <a:ext cx="8290560" cy="0"/>
-          </a:xfrm>
-          <a:prstGeom prst="line">
-            <a:avLst/>
-          </a:prstGeom>
-          <a:ln w="25400">
-            <a:solidFill>
-              <a:srgbClr val="B4C7D2"/>
-            </a:solidFill>
-          </a:ln>
-          <a:effectLst/>
-        </p:spPr>
-      </p:cxnSp>
-      <p:cxnSp>
-        <p:nvCxnSpPr>
-          <p:cNvPr id="5" name="line4" descr="sci-ppt:C1-E23-004"/>
-          <p:cNvCxnSpPr/>
-          <p:nvPr/>
-        </p:nvCxnSpPr>
-        <p:spPr>
-          <a:xfrm>
-            <a:off x="1219200" y="3657600"/>
-            <a:ext cx="8290560" cy="0"/>
-          </a:xfrm>
-          <a:prstGeom prst="line">
-            <a:avLst/>
-          </a:prstGeom>
-          <a:ln w="25400">
-            <a:solidFill>
-              <a:srgbClr val="B4C7D2"/>
-            </a:solidFill>
-          </a:ln>
-          <a:effectLst/>
-        </p:spPr>
-      </p:cxnSp>
-      <p:cxnSp>
-        <p:nvCxnSpPr>
-          <p:cNvPr id="6" name="arrow5" descr="sci-ppt:C1-E23-005"/>
-          <p:cNvCxnSpPr/>
-          <p:nvPr/>
-        </p:nvCxnSpPr>
-        <p:spPr>
-          <a:xfrm>
-            <a:off x="2316480" y="2926080"/>
-            <a:ext cx="5608319" cy="0"/>
-          </a:xfrm>
-          <a:prstGeom prst="line">
-            <a:avLst/>
-          </a:prstGeom>
-          <a:ln w="25400">
-            <a:solidFill>
-              <a:srgbClr val="8EDBD4"/>
-            </a:solidFill>
-            <a:headEnd type="none" w="med" len="med"/>
-            <a:tailEnd type="triangle" w="med" len="med"/>
-          </a:ln>
-          <a:effectLst/>
-        </p:spPr>
-      </p:cxnSp>
-      <p:sp>
-        <p:nvSpPr>
-          <p:cNvPr id="7" name="text6" descr="sci-ppt:C1-E23-006"/>
+      <p:sp>
+        <p:nvSpPr>
+          <p:cNvPr id="32" name="C1-E23 text 30" descr="sci-ppt:o030"/>
           <p:cNvSpPr txBox="1"/>
           <p:nvPr/>
         </p:nvSpPr>
         <p:spPr>
           <a:xfrm>
-            <a:off x="1402080" y="1463040"/>
-            <a:ext cx="3657600" cy="377952"/>
+            <a:off x="6995160" y="4636008"/>
+            <a:ext cx="4663440" cy="247142"/>
           </a:xfrm>
           <a:prstGeom prst="rect">
             <a:avLst/>
@@ -3254,7 +4522,7 @@
           <a:effectLst/>
         </p:spPr>
         <p:txBody>
-          <a:bodyPr wrap="none" lIns="27432" rIns="27432" tIns="18288" bIns="18288" anchor="ctr">
+          <a:bodyPr wrap="none" lIns="18288" rIns="18288" tIns="18288" bIns="18288" anchor="t">
             <a:spAutoFit/>
           </a:bodyPr>
           <a:lstStyle/>
@@ -3265,27 +4533,27 @@
               </a:spcAft>
             </a:pPr>
             <a:r>
-              <a:rPr sz="1920" b="0" i="0">
+              <a:rPr sz="1300" b="1" i="0">
                 <a:solidFill>
                   <a:srgbClr val="E7F0F3"/>
                 </a:solidFill>
                 <a:latin typeface="Arial"/>
               </a:rPr>
-              <a:t>Π0 at z = 0</a:t>
-            </a:r>
-          </a:p>
-        </p:txBody>
-      </p:sp>
-      <p:sp>
-        <p:nvSpPr>
-          <p:cNvPr id="8" name="text7" descr="sci-ppt:C1-E23-007"/>
+              <a:t>Conditions: Uτ/L ≪ 1 and ντ/L² ≪ 1.</a:t>
+            </a:r>
+          </a:p>
+        </p:txBody>
+      </p:sp>
+      <p:sp>
+        <p:nvSpPr>
+          <p:cNvPr id="33" name="C1-E23 text 31" descr="sci-ppt:o031"/>
           <p:cNvSpPr txBox="1"/>
           <p:nvPr/>
         </p:nvSpPr>
         <p:spPr>
           <a:xfrm>
-            <a:off x="7315200" y="1463040"/>
-            <a:ext cx="4267200" cy="377952"/>
+            <a:off x="6995160" y="5029200"/>
+            <a:ext cx="4663440" cy="626745"/>
           </a:xfrm>
           <a:prstGeom prst="rect">
             <a:avLst/>
@@ -3294,7 +4562,7 @@
           <a:effectLst/>
         </p:spPr>
         <p:txBody>
-          <a:bodyPr wrap="none" lIns="27432" rIns="27432" tIns="18288" bIns="18288" anchor="ctr">
+          <a:bodyPr wrap="none" lIns="18288" rIns="18288" tIns="18288" bIns="18288" anchor="t">
             <a:spAutoFit/>
           </a:bodyPr>
           <a:lstStyle/>
@@ -3305,27 +4573,59 @@
               </a:spcAft>
             </a:pPr>
             <a:r>
-              <a:rPr sz="1920" b="0" i="0">
+              <a:rPr sz="1250" b="0" i="0">
                 <a:solidFill>
-                  <a:srgbClr val="E7F0F3"/>
+                  <a:srgbClr val="F2B880"/>
                 </a:solidFill>
                 <a:latin typeface="Arial"/>
               </a:rPr>
-              <a:t>Π = 0 at z = L</a:t>
-            </a:r>
-          </a:p>
-        </p:txBody>
-      </p:sp>
-      <p:sp>
-        <p:nvSpPr>
-          <p:cNvPr id="9" name="text8" descr="sci-ppt:C1-E23-008"/>
+              <a:t>Result: the velocity right after the pulse depends on</a:t>
+            </a:r>
+          </a:p>
+          <a:p>
+            <a:pPr algn="l">
+              <a:spcAft>
+                <a:spcPts val="0"/>
+              </a:spcAft>
+            </a:pPr>
+            <a:r>
+              <a:rPr sz="1250" b="0" i="0">
+                <a:solidFill>
+                  <a:srgbClr val="F2B880"/>
+                </a:solidFill>
+                <a:latin typeface="Arial"/>
+              </a:rPr>
+              <a:t>the shape of the liquid region, not on a detailed</a:t>
+            </a:r>
+          </a:p>
+          <a:p>
+            <a:pPr algn="l">
+              <a:spcAft>
+                <a:spcPts val="0"/>
+              </a:spcAft>
+            </a:pPr>
+            <a:r>
+              <a:rPr sz="1250" b="0" i="0">
+                <a:solidFill>
+                  <a:srgbClr val="F2B880"/>
+                </a:solidFill>
+                <a:latin typeface="Arial"/>
+              </a:rPr>
+              <a:t>pressure history.</a:t>
+            </a:r>
+          </a:p>
+        </p:txBody>
+      </p:sp>
+      <p:sp>
+        <p:nvSpPr>
+          <p:cNvPr id="34" name="C1-E23 text 32" descr="sci-ppt:o032"/>
           <p:cNvSpPr txBox="1"/>
           <p:nvPr/>
         </p:nvSpPr>
         <p:spPr>
           <a:xfrm>
-            <a:off x="3108960" y="2987040"/>
-            <a:ext cx="4876800" cy="359054"/>
+            <a:off x="320040" y="6510528"/>
+            <a:ext cx="11521440" cy="200660"/>
           </a:xfrm>
           <a:prstGeom prst="rect">
             <a:avLst/>
@@ -3334,7 +4634,7 @@
           <a:effectLst/>
         </p:spPr>
         <p:txBody>
-          <a:bodyPr wrap="none" lIns="27432" rIns="27432" tIns="18288" bIns="18288" anchor="ctr">
+          <a:bodyPr wrap="none" lIns="18288" rIns="18288" tIns="18288" bIns="18288" anchor="t">
             <a:spAutoFit/>
           </a:bodyPr>
           <a:lstStyle/>
@@ -3345,413 +4645,13 @@
               </a:spcAft>
             </a:pPr>
             <a:r>
-              <a:rPr sz="1823" b="0" i="0">
-                <a:solidFill>
-                  <a:srgbClr val="E7F0F3"/>
-                </a:solidFill>
-                <a:latin typeface="Arial"/>
-              </a:rPr>
-              <a:t>Δ u_z toward outlet</a:t>
-            </a:r>
-          </a:p>
-        </p:txBody>
-      </p:sp>
-      <p:sp>
-        <p:nvSpPr>
-          <p:cNvPr id="10" name="text9" descr="sci-ppt:C1-E23-009"/>
-          <p:cNvSpPr txBox="1"/>
-          <p:nvPr/>
-        </p:nvSpPr>
-        <p:spPr>
-          <a:xfrm>
-            <a:off x="2255520" y="4084320"/>
-            <a:ext cx="9022080" cy="359054"/>
-          </a:xfrm>
-          <a:prstGeom prst="rect">
-            <a:avLst/>
-          </a:prstGeom>
-          <a:noFill/>
-          <a:effectLst/>
-        </p:spPr>
-        <p:txBody>
-          <a:bodyPr wrap="none" lIns="27432" rIns="27432" tIns="18288" bIns="18288" anchor="ctr">
-            <a:spAutoFit/>
-          </a:bodyPr>
-          <a:lstStyle/>
-          <a:p>
-            <a:pPr algn="l">
-              <a:spcAft>
-                <a:spcPts val="0"/>
-              </a:spcAft>
-            </a:pPr>
-            <a:r>
-              <a:rPr sz="1823" b="0" i="0">
-                <a:solidFill>
-                  <a:srgbClr val="E7F0F3"/>
-                </a:solidFill>
-                <a:latin typeface="Arial"/>
-              </a:rPr>
-              <a:t>Pressure impulse gradient drives early acceleration.</a:t>
-            </a:r>
-          </a:p>
-        </p:txBody>
-      </p:sp>
-      <p:sp>
-        <p:nvSpPr>
-          <p:cNvPr id="11" name="text10" descr="sci-ppt:C1-E23-010"/>
-          <p:cNvSpPr txBox="1"/>
-          <p:nvPr/>
-        </p:nvSpPr>
-        <p:spPr>
-          <a:xfrm>
-            <a:off x="365760" y="4974336"/>
-            <a:ext cx="5547360" cy="321259"/>
-          </a:xfrm>
-          <a:prstGeom prst="rect">
-            <a:avLst/>
-          </a:prstGeom>
-          <a:noFill/>
-          <a:effectLst/>
-        </p:spPr>
-        <p:txBody>
-          <a:bodyPr wrap="none" lIns="27432" rIns="27432" tIns="18288" bIns="18288" anchor="ctr">
-            <a:spAutoFit/>
-          </a:bodyPr>
-          <a:lstStyle/>
-          <a:p>
-            <a:pPr algn="l">
-              <a:spcAft>
-                <a:spcPts val="0"/>
-              </a:spcAft>
-            </a:pPr>
-            <a:r>
-              <a:rPr sz="1632" b="0" i="0">
-                <a:solidFill>
-                  <a:srgbClr val="E7F0F3"/>
-                </a:solidFill>
-                <a:latin typeface="Arial"/>
-              </a:rPr>
-              <a:t>U</a:t>
-            </a:r>
-          </a:p>
-        </p:txBody>
-      </p:sp>
-      <p:sp>
-        <p:nvSpPr>
-          <p:cNvPr id="12" name="text11" descr="sci-ppt:C1-E23-011"/>
-          <p:cNvSpPr txBox="1"/>
-          <p:nvPr/>
-        </p:nvSpPr>
-        <p:spPr>
-          <a:xfrm>
-            <a:off x="365760" y="5266944"/>
-            <a:ext cx="5547360" cy="321259"/>
-          </a:xfrm>
-          <a:prstGeom prst="rect">
-            <a:avLst/>
-          </a:prstGeom>
-          <a:noFill/>
-          <a:effectLst/>
-        </p:spPr>
-        <p:txBody>
-          <a:bodyPr wrap="none" lIns="27432" rIns="27432" tIns="18288" bIns="18288" anchor="ctr">
-            <a:spAutoFit/>
-          </a:bodyPr>
-          <a:lstStyle/>
-          <a:p>
-            <a:pPr algn="l">
-              <a:spcAft>
-                <a:spcPts val="0"/>
-              </a:spcAft>
-            </a:pPr>
-            <a:r>
-              <a:rPr sz="1632" b="0" i="0">
-                <a:solidFill>
-                  <a:srgbClr val="E7F0F3"/>
-                </a:solidFill>
-                <a:latin typeface="Arial"/>
-              </a:rPr>
-              <a:t>L</a:t>
-            </a:r>
-          </a:p>
-        </p:txBody>
-      </p:sp>
-      <p:sp>
-        <p:nvSpPr>
-          <p:cNvPr id="13" name="text12" descr="sci-ppt:C1-E23-012"/>
-          <p:cNvSpPr txBox="1"/>
-          <p:nvPr/>
-        </p:nvSpPr>
-        <p:spPr>
-          <a:xfrm>
-            <a:off x="365760" y="5559552"/>
-            <a:ext cx="5547360" cy="321259"/>
-          </a:xfrm>
-          <a:prstGeom prst="rect">
-            <a:avLst/>
-          </a:prstGeom>
-          <a:noFill/>
-          <a:effectLst/>
-        </p:spPr>
-        <p:txBody>
-          <a:bodyPr wrap="none" lIns="27432" rIns="27432" tIns="18288" bIns="18288" anchor="ctr">
-            <a:spAutoFit/>
-          </a:bodyPr>
-          <a:lstStyle/>
-          <a:p>
-            <a:pPr algn="l">
-              <a:spcAft>
-                <a:spcPts val="0"/>
-              </a:spcAft>
-            </a:pPr>
-            <a:r>
-              <a:rPr sz="1632" b="0" i="0">
-                <a:solidFill>
-                  <a:srgbClr val="E7F0F3"/>
-                </a:solidFill>
-                <a:latin typeface="Arial"/>
-              </a:rPr>
-              <a:t>Π(x)</a:t>
-            </a:r>
-          </a:p>
-        </p:txBody>
-      </p:sp>
-      <p:sp>
-        <p:nvSpPr>
-          <p:cNvPr id="14" name="text13" descr="sci-ppt:C1-E23-013"/>
-          <p:cNvSpPr txBox="1"/>
-          <p:nvPr/>
-        </p:nvSpPr>
-        <p:spPr>
-          <a:xfrm>
-            <a:off x="365760" y="5852160"/>
-            <a:ext cx="5547360" cy="321259"/>
-          </a:xfrm>
-          <a:prstGeom prst="rect">
-            <a:avLst/>
-          </a:prstGeom>
-          <a:noFill/>
-          <a:effectLst/>
-        </p:spPr>
-        <p:txBody>
-          <a:bodyPr wrap="none" lIns="27432" rIns="27432" tIns="18288" bIns="18288" anchor="ctr">
-            <a:spAutoFit/>
-          </a:bodyPr>
-          <a:lstStyle/>
-          <a:p>
-            <a:pPr algn="l">
-              <a:spcAft>
-                <a:spcPts val="0"/>
-              </a:spcAft>
-            </a:pPr>
-            <a:r>
-              <a:rPr sz="1632" b="0" i="0">
-                <a:solidFill>
-                  <a:srgbClr val="E7F0F3"/>
-                </a:solidFill>
-                <a:latin typeface="Arial"/>
-              </a:rPr>
-              <a:t>∇²Π = 0</a:t>
-            </a:r>
-          </a:p>
-        </p:txBody>
-      </p:sp>
-      <p:sp>
-        <p:nvSpPr>
-          <p:cNvPr id="15" name="text14" descr="sci-ppt:C1-E23-014"/>
-          <p:cNvSpPr txBox="1"/>
-          <p:nvPr/>
-        </p:nvSpPr>
-        <p:spPr>
-          <a:xfrm>
-            <a:off x="6156960" y="4974336"/>
-            <a:ext cx="5547360" cy="321259"/>
-          </a:xfrm>
-          <a:prstGeom prst="rect">
-            <a:avLst/>
-          </a:prstGeom>
-          <a:noFill/>
-          <a:effectLst/>
-        </p:spPr>
-        <p:txBody>
-          <a:bodyPr wrap="none" lIns="27432" rIns="27432" tIns="18288" bIns="18288" anchor="ctr">
-            <a:spAutoFit/>
-          </a:bodyPr>
-          <a:lstStyle/>
-          <a:p>
-            <a:pPr algn="l">
-              <a:spcAft>
-                <a:spcPts val="0"/>
-              </a:spcAft>
-            </a:pPr>
-            <a:r>
-              <a:rPr sz="1632" b="0" i="0">
-                <a:solidFill>
-                  <a:srgbClr val="E7F0F3"/>
-                </a:solidFill>
-                <a:latin typeface="Arial"/>
-              </a:rPr>
-              <a:t>τ</a:t>
-            </a:r>
-          </a:p>
-        </p:txBody>
-      </p:sp>
-      <p:sp>
-        <p:nvSpPr>
-          <p:cNvPr id="16" name="text15" descr="sci-ppt:C1-E23-015"/>
-          <p:cNvSpPr txBox="1"/>
-          <p:nvPr/>
-        </p:nvSpPr>
-        <p:spPr>
-          <a:xfrm>
-            <a:off x="6156960" y="5266944"/>
-            <a:ext cx="5547360" cy="321259"/>
-          </a:xfrm>
-          <a:prstGeom prst="rect">
-            <a:avLst/>
-          </a:prstGeom>
-          <a:noFill/>
-          <a:effectLst/>
-        </p:spPr>
-        <p:txBody>
-          <a:bodyPr wrap="none" lIns="27432" rIns="27432" tIns="18288" bIns="18288" anchor="ctr">
-            <a:spAutoFit/>
-          </a:bodyPr>
-          <a:lstStyle/>
-          <a:p>
-            <a:pPr algn="l">
-              <a:spcAft>
-                <a:spcPts val="0"/>
-              </a:spcAft>
-            </a:pPr>
-            <a:r>
-              <a:rPr sz="1632" b="0" i="0">
-                <a:solidFill>
-                  <a:srgbClr val="E7F0F3"/>
-                </a:solidFill>
-                <a:latin typeface="Arial"/>
-              </a:rPr>
-              <a:t>ν</a:t>
-            </a:r>
-          </a:p>
-        </p:txBody>
-      </p:sp>
-      <p:sp>
-        <p:nvSpPr>
-          <p:cNvPr id="17" name="text16" descr="sci-ppt:C1-E23-016"/>
-          <p:cNvSpPr txBox="1"/>
-          <p:nvPr/>
-        </p:nvSpPr>
-        <p:spPr>
-          <a:xfrm>
-            <a:off x="6156960" y="5559552"/>
-            <a:ext cx="5547360" cy="321259"/>
-          </a:xfrm>
-          <a:prstGeom prst="rect">
-            <a:avLst/>
-          </a:prstGeom>
-          <a:noFill/>
-          <a:effectLst/>
-        </p:spPr>
-        <p:txBody>
-          <a:bodyPr wrap="none" lIns="27432" rIns="27432" tIns="18288" bIns="18288" anchor="ctr">
-            <a:spAutoFit/>
-          </a:bodyPr>
-          <a:lstStyle/>
-          <a:p>
-            <a:pPr algn="l">
-              <a:spcAft>
-                <a:spcPts val="0"/>
-              </a:spcAft>
-            </a:pPr>
-            <a:r>
-              <a:rPr sz="1632" b="0" i="0">
-                <a:solidFill>
-                  <a:srgbClr val="E7F0F3"/>
-                </a:solidFill>
-                <a:latin typeface="Arial"/>
-              </a:rPr>
-              <a:t>Δu ≈ −∇Π/ρ</a:t>
-            </a:r>
-          </a:p>
-        </p:txBody>
-      </p:sp>
-      <p:sp>
-        <p:nvSpPr>
-          <p:cNvPr id="18" name="text17" descr="sci-ppt:C1-E23-017"/>
-          <p:cNvSpPr txBox="1"/>
-          <p:nvPr/>
-        </p:nvSpPr>
-        <p:spPr>
-          <a:xfrm>
-            <a:off x="6156960" y="5852160"/>
-            <a:ext cx="5547360" cy="321259"/>
-          </a:xfrm>
-          <a:prstGeom prst="rect">
-            <a:avLst/>
-          </a:prstGeom>
-          <a:noFill/>
-          <a:effectLst/>
-        </p:spPr>
-        <p:txBody>
-          <a:bodyPr wrap="none" lIns="27432" rIns="27432" tIns="18288" bIns="18288" anchor="ctr">
-            <a:spAutoFit/>
-          </a:bodyPr>
-          <a:lstStyle/>
-          <a:p>
-            <a:pPr algn="l">
-              <a:spcAft>
-                <a:spcPts val="0"/>
-              </a:spcAft>
-            </a:pPr>
-            <a:r>
-              <a:rPr sz="1632" b="0" i="0">
-                <a:solidFill>
-                  <a:srgbClr val="E7F0F3"/>
-                </a:solidFill>
-                <a:latin typeface="Arial"/>
-              </a:rPr>
-              <a:t>ρ</a:t>
-            </a:r>
-          </a:p>
-        </p:txBody>
-      </p:sp>
-      <p:sp>
-        <p:nvSpPr>
-          <p:cNvPr id="19" name="text18" descr="sci-ppt:C1-E23-018"/>
-          <p:cNvSpPr txBox="1"/>
-          <p:nvPr/>
-        </p:nvSpPr>
-        <p:spPr>
-          <a:xfrm>
-            <a:off x="365760" y="6339840"/>
-            <a:ext cx="11277600" cy="302361"/>
-          </a:xfrm>
-          <a:prstGeom prst="rect">
-            <a:avLst/>
-          </a:prstGeom>
-          <a:noFill/>
-          <a:effectLst/>
-        </p:spPr>
-        <p:txBody>
-          <a:bodyPr wrap="none" lIns="27432" rIns="27432" tIns="18288" bIns="18288" anchor="ctr">
-            <a:spAutoFit/>
-          </a:bodyPr>
-          <a:lstStyle/>
-          <a:p>
-            <a:pPr algn="l">
-              <a:spcAft>
-                <a:spcPts val="0"/>
-              </a:spcAft>
-            </a:pPr>
-            <a:r>
-              <a:rPr sz="1536" b="0" i="0">
+              <a:rPr sz="1000" b="0" i="0">
                 <a:solidFill>
                   <a:srgbClr val="B4C7D2"/>
                 </a:solidFill>
                 <a:latin typeface="Arial"/>
               </a:rPr>
-              <a:t>Freeze the domain only while displacement and residual impulses remain small</a:t>
+              <a:t>Corner example: an exact harmonic solution chosen to show the geometry dependence; not a model of the laser event.</a:t>
             </a:r>
           </a:p>
         </p:txBody>

--- a/assets/figures-editable/c1-c2/c1-e23.pptx
+++ b/assets/figures-editable/c1-c2/c1-e23.pptx
@@ -3131,161 +3131,29 @@
                 </a:solidFill>
                 <a:latin typeface="Arial"/>
               </a:rPr>
-              <a:t>C1-E23 · Short-event reduced pressure-impulse model</a:t>
-            </a:r>
-          </a:p>
-        </p:txBody>
-      </p:sp>
-      <p:sp>
-        <p:nvSpPr>
-          <p:cNvPr id="3" name="C1-E23 polygon 1" descr="sci-ppt:o001"/>
+              <a:t>C1-E23 · Exact straight-column solution of the reduced model</a:t>
+            </a:r>
+          </a:p>
+        </p:txBody>
+      </p:sp>
+      <p:sp>
+        <p:nvSpPr>
+          <p:cNvPr id="3" name="C1-E23 rect 1" descr="sci-ppt:o001"/>
           <p:cNvSpPr/>
           <p:nvPr/>
         </p:nvSpPr>
         <p:spPr>
           <a:xfrm>
-            <a:off x="1005840" y="1097280"/>
-            <a:ext cx="4572000" cy="4572000"/>
-          </a:xfrm>
-          <a:custGeom>
-            <a:avLst/>
-            <a:gdLst/>
-            <a:ahLst/>
-            <a:cxnLst/>
-            <a:rect l="l" t="t" r="r" b="b"/>
-            <a:pathLst>
-              <a:path w="4572000" h="4572000">
-                <a:moveTo>
-                  <a:pt x="0" y="4572000"/>
-                </a:moveTo>
-                <a:lnTo>
-                  <a:pt x="4572000" y="4572000"/>
-                </a:lnTo>
-                <a:lnTo>
-                  <a:pt x="4568292" y="4387904"/>
-                </a:lnTo>
-                <a:lnTo>
-                  <a:pt x="4557174" y="4204106"/>
-                </a:lnTo>
-                <a:lnTo>
-                  <a:pt x="4538664" y="4020906"/>
-                </a:lnTo>
-                <a:lnTo>
-                  <a:pt x="4512793" y="3838599"/>
-                </a:lnTo>
-                <a:lnTo>
-                  <a:pt x="4479602" y="3657482"/>
-                </a:lnTo>
-                <a:lnTo>
-                  <a:pt x="4439145" y="3477848"/>
-                </a:lnTo>
-                <a:lnTo>
-                  <a:pt x="4391488" y="3299989"/>
-                </a:lnTo>
-                <a:lnTo>
-                  <a:pt x="4336708" y="3124193"/>
-                </a:lnTo>
-                <a:lnTo>
-                  <a:pt x="4274894" y="2950746"/>
-                </a:lnTo>
-                <a:lnTo>
-                  <a:pt x="4206146" y="2779928"/>
-                </a:lnTo>
-                <a:lnTo>
-                  <a:pt x="4130575" y="2612017"/>
-                </a:lnTo>
-                <a:lnTo>
-                  <a:pt x="4048304" y="2447285"/>
-                </a:lnTo>
-                <a:lnTo>
-                  <a:pt x="3959468" y="2286000"/>
-                </a:lnTo>
-                <a:lnTo>
-                  <a:pt x="3864209" y="2128422"/>
-                </a:lnTo>
-                <a:lnTo>
-                  <a:pt x="3762682" y="1974807"/>
-                </a:lnTo>
-                <a:lnTo>
-                  <a:pt x="3655052" y="1825406"/>
-                </a:lnTo>
-                <a:lnTo>
-                  <a:pt x="3541493" y="1680459"/>
-                </a:lnTo>
-                <a:lnTo>
-                  <a:pt x="3422191" y="1540203"/>
-                </a:lnTo>
-                <a:lnTo>
-                  <a:pt x="3297337" y="1404864"/>
-                </a:lnTo>
-                <a:lnTo>
-                  <a:pt x="3167135" y="1274662"/>
-                </a:lnTo>
-                <a:lnTo>
-                  <a:pt x="3031796" y="1149808"/>
-                </a:lnTo>
-                <a:lnTo>
-                  <a:pt x="2891540" y="1030506"/>
-                </a:lnTo>
-                <a:lnTo>
-                  <a:pt x="2746593" y="916947"/>
-                </a:lnTo>
-                <a:lnTo>
-                  <a:pt x="2597192" y="809317"/>
-                </a:lnTo>
-                <a:lnTo>
-                  <a:pt x="2443577" y="707790"/>
-                </a:lnTo>
-                <a:lnTo>
-                  <a:pt x="2286000" y="612531"/>
-                </a:lnTo>
-                <a:lnTo>
-                  <a:pt x="2124714" y="523695"/>
-                </a:lnTo>
-                <a:lnTo>
-                  <a:pt x="1959982" y="441424"/>
-                </a:lnTo>
-                <a:lnTo>
-                  <a:pt x="1792071" y="365853"/>
-                </a:lnTo>
-                <a:lnTo>
-                  <a:pt x="1621253" y="297105"/>
-                </a:lnTo>
-                <a:lnTo>
-                  <a:pt x="1447806" y="235291"/>
-                </a:lnTo>
-                <a:lnTo>
-                  <a:pt x="1272010" y="180511"/>
-                </a:lnTo>
-                <a:lnTo>
-                  <a:pt x="1094151" y="132854"/>
-                </a:lnTo>
-                <a:lnTo>
-                  <a:pt x="914517" y="92397"/>
-                </a:lnTo>
-                <a:lnTo>
-                  <a:pt x="733400" y="59206"/>
-                </a:lnTo>
-                <a:lnTo>
-                  <a:pt x="551093" y="33335"/>
-                </a:lnTo>
-                <a:lnTo>
-                  <a:pt x="367893" y="14825"/>
-                </a:lnTo>
-                <a:lnTo>
-                  <a:pt x="184095" y="3707"/>
-                </a:lnTo>
-                <a:lnTo>
-                  <a:pt x="0" y="0"/>
-                </a:lnTo>
-                <a:close/>
-              </a:path>
-            </a:pathLst>
-          </a:custGeom>
+            <a:off x="1188720" y="1417319"/>
+            <a:ext cx="6400800" cy="640080"/>
+          </a:xfrm>
+          <a:prstGeom prst="rect">
+            <a:avLst/>
+          </a:prstGeom>
           <a:solidFill>
             <a:srgbClr val="1E4A5A"/>
           </a:solidFill>
-          <a:ln w="17780">
+          <a:ln w="19050">
             <a:solidFill>
               <a:srgbClr val="2B6678"/>
             </a:solidFill>
@@ -3300,39 +3168,290 @@
           </a:p>
         </p:txBody>
       </p:sp>
+      <p:sp>
+        <p:nvSpPr>
+          <p:cNvPr id="4" name="C1-E23 rect 2" descr="sci-ppt:o002"/>
+          <p:cNvSpPr/>
+          <p:nvPr/>
+        </p:nvSpPr>
+        <p:spPr>
+          <a:xfrm>
+            <a:off x="1005840" y="1325880"/>
+            <a:ext cx="182880" cy="822960"/>
+          </a:xfrm>
+          <a:prstGeom prst="rect">
+            <a:avLst/>
+          </a:prstGeom>
+          <a:solidFill>
+            <a:srgbClr val="3A5362"/>
+          </a:solidFill>
+          <a:ln w="16510">
+            <a:solidFill>
+              <a:srgbClr val="B4C7D2"/>
+            </a:solidFill>
+          </a:ln>
+          <a:effectLst/>
+        </p:spPr>
+        <p:txBody>
+          <a:bodyPr rtlCol="0" anchor="ctr"/>
+          <a:lstStyle/>
+          <a:p>
+            <a:pPr algn="ctr"/>
+          </a:p>
+        </p:txBody>
+      </p:sp>
+      <p:sp>
+        <p:nvSpPr>
+          <p:cNvPr id="5" name="C1-E23 text 3" descr="sci-ppt:o003"/>
+          <p:cNvSpPr txBox="1"/>
+          <p:nvPr/>
+        </p:nvSpPr>
+        <p:spPr>
+          <a:xfrm>
+            <a:off x="731520" y="868680"/>
+            <a:ext cx="2194560" cy="223900"/>
+          </a:xfrm>
+          <a:prstGeom prst="rect">
+            <a:avLst/>
+          </a:prstGeom>
+          <a:noFill/>
+          <a:effectLst/>
+        </p:spPr>
+        <p:txBody>
+          <a:bodyPr wrap="none" lIns="18288" rIns="18288" tIns="18288" bIns="18288" anchor="t">
+            <a:spAutoFit/>
+          </a:bodyPr>
+          <a:lstStyle/>
+          <a:p>
+            <a:pPr algn="l">
+              <a:spcAft>
+                <a:spcPts val="0"/>
+              </a:spcAft>
+            </a:pPr>
+            <a:r>
+              <a:rPr sz="1150" b="1" i="0">
+                <a:solidFill>
+                  <a:srgbClr val="F2B880"/>
+                </a:solidFill>
+                <a:latin typeface="Arial"/>
+              </a:rPr>
+              <a:t>driven end z = 0</a:t>
+            </a:r>
+          </a:p>
+        </p:txBody>
+      </p:sp>
+      <p:sp>
+        <p:nvSpPr>
+          <p:cNvPr id="6" name="C1-E23 text 4" descr="sci-ppt:o004"/>
+          <p:cNvSpPr txBox="1"/>
+          <p:nvPr/>
+        </p:nvSpPr>
+        <p:spPr>
+          <a:xfrm>
+            <a:off x="6126480" y="868680"/>
+            <a:ext cx="2377440" cy="223900"/>
+          </a:xfrm>
+          <a:prstGeom prst="rect">
+            <a:avLst/>
+          </a:prstGeom>
+          <a:noFill/>
+          <a:effectLst/>
+        </p:spPr>
+        <p:txBody>
+          <a:bodyPr wrap="none" lIns="18288" rIns="18288" tIns="18288" bIns="18288" anchor="t">
+            <a:spAutoFit/>
+          </a:bodyPr>
+          <a:lstStyle/>
+          <a:p>
+            <a:pPr algn="l">
+              <a:spcAft>
+                <a:spcPts val="0"/>
+              </a:spcAft>
+            </a:pPr>
+            <a:r>
+              <a:rPr sz="1150" b="1" i="0">
+                <a:solidFill>
+                  <a:srgbClr val="8EDBD4"/>
+                </a:solidFill>
+                <a:latin typeface="Arial"/>
+              </a:rPr>
+              <a:t>outlet z = L</a:t>
+            </a:r>
+          </a:p>
+        </p:txBody>
+      </p:sp>
       <p:cxnSp>
         <p:nvCxnSpPr>
-          <p:cNvPr id="4" name="C1-E23 line 2" descr="sci-ppt:o002"/>
+          <p:cNvPr id="7" name="C1-E23 arrow 5" descr="sci-ppt:o005"/>
           <p:cNvCxnSpPr/>
           <p:nvPr/>
         </p:nvCxnSpPr>
         <p:spPr>
-          <a:xfrm flipV="1">
-            <a:off x="1005840" y="4256454"/>
-            <a:ext cx="4348230" cy="1412826"/>
+          <a:xfrm>
+            <a:off x="1737360" y="1737360"/>
+            <a:ext cx="822960" cy="0"/>
           </a:xfrm>
           <a:prstGeom prst="line">
             <a:avLst/>
           </a:prstGeom>
-          <a:ln w="13970">
+          <a:ln w="38100">
+            <a:solidFill>
+              <a:srgbClr val="8EDBD4"/>
+            </a:solidFill>
+            <a:headEnd type="none" w="med" len="med"/>
+            <a:tailEnd type="triangle" w="med" len="med"/>
+          </a:ln>
+          <a:effectLst/>
+        </p:spPr>
+      </p:cxnSp>
+      <p:cxnSp>
+        <p:nvCxnSpPr>
+          <p:cNvPr id="8" name="C1-E23 arrow 6" descr="sci-ppt:o006"/>
+          <p:cNvCxnSpPr/>
+          <p:nvPr/>
+        </p:nvCxnSpPr>
+        <p:spPr>
+          <a:xfrm>
+            <a:off x="3017520" y="1737360"/>
+            <a:ext cx="822960" cy="0"/>
+          </a:xfrm>
+          <a:prstGeom prst="line">
+            <a:avLst/>
+          </a:prstGeom>
+          <a:ln w="38100">
+            <a:solidFill>
+              <a:srgbClr val="8EDBD4"/>
+            </a:solidFill>
+            <a:headEnd type="none" w="med" len="med"/>
+            <a:tailEnd type="triangle" w="med" len="med"/>
+          </a:ln>
+          <a:effectLst/>
+        </p:spPr>
+      </p:cxnSp>
+      <p:cxnSp>
+        <p:nvCxnSpPr>
+          <p:cNvPr id="9" name="C1-E23 arrow 7" descr="sci-ppt:o007"/>
+          <p:cNvCxnSpPr/>
+          <p:nvPr/>
+        </p:nvCxnSpPr>
+        <p:spPr>
+          <a:xfrm>
+            <a:off x="4297679" y="1737360"/>
+            <a:ext cx="822961" cy="0"/>
+          </a:xfrm>
+          <a:prstGeom prst="line">
+            <a:avLst/>
+          </a:prstGeom>
+          <a:ln w="38100">
+            <a:solidFill>
+              <a:srgbClr val="8EDBD4"/>
+            </a:solidFill>
+            <a:headEnd type="none" w="med" len="med"/>
+            <a:tailEnd type="triangle" w="med" len="med"/>
+          </a:ln>
+          <a:effectLst/>
+        </p:spPr>
+      </p:cxnSp>
+      <p:cxnSp>
+        <p:nvCxnSpPr>
+          <p:cNvPr id="10" name="C1-E23 arrow 8" descr="sci-ppt:o008"/>
+          <p:cNvCxnSpPr/>
+          <p:nvPr/>
+        </p:nvCxnSpPr>
+        <p:spPr>
+          <a:xfrm>
+            <a:off x="5577840" y="1737360"/>
+            <a:ext cx="822960" cy="0"/>
+          </a:xfrm>
+          <a:prstGeom prst="line">
+            <a:avLst/>
+          </a:prstGeom>
+          <a:ln w="38100">
+            <a:solidFill>
+              <a:srgbClr val="8EDBD4"/>
+            </a:solidFill>
+            <a:headEnd type="none" w="med" len="med"/>
+            <a:tailEnd type="triangle" w="med" len="med"/>
+          </a:ln>
+          <a:effectLst/>
+        </p:spPr>
+      </p:cxnSp>
+      <p:cxnSp>
+        <p:nvCxnSpPr>
+          <p:cNvPr id="11" name="C1-E23 line 9" descr="sci-ppt:o009"/>
+          <p:cNvCxnSpPr/>
+          <p:nvPr/>
+        </p:nvCxnSpPr>
+        <p:spPr>
+          <a:xfrm>
+            <a:off x="1188720" y="2240280"/>
+            <a:ext cx="6400800" cy="0"/>
+          </a:xfrm>
+          <a:prstGeom prst="line">
+            <a:avLst/>
+          </a:prstGeom>
+          <a:ln w="16510">
             <a:solidFill>
               <a:srgbClr val="B4C7D2"/>
             </a:solidFill>
-            <a:prstDash val="dash"/>
           </a:ln>
           <a:effectLst/>
         </p:spPr>
       </p:cxnSp>
-      <p:sp>
-        <p:nvSpPr>
-          <p:cNvPr id="5" name="C1-E23 text 3" descr="sci-ppt:o003"/>
+      <p:cxnSp>
+        <p:nvCxnSpPr>
+          <p:cNvPr id="12" name="C1-E23 line 10" descr="sci-ppt:o010"/>
+          <p:cNvCxnSpPr/>
+          <p:nvPr/>
+        </p:nvCxnSpPr>
+        <p:spPr>
+          <a:xfrm>
+            <a:off x="1188720" y="2176272"/>
+            <a:ext cx="0" cy="128016"/>
+          </a:xfrm>
+          <a:prstGeom prst="line">
+            <a:avLst/>
+          </a:prstGeom>
+          <a:ln w="16510">
+            <a:solidFill>
+              <a:srgbClr val="B4C7D2"/>
+            </a:solidFill>
+          </a:ln>
+          <a:effectLst/>
+        </p:spPr>
+      </p:cxnSp>
+      <p:cxnSp>
+        <p:nvCxnSpPr>
+          <p:cNvPr id="13" name="C1-E23 line 11" descr="sci-ppt:o011"/>
+          <p:cNvCxnSpPr/>
+          <p:nvPr/>
+        </p:nvCxnSpPr>
+        <p:spPr>
+          <a:xfrm>
+            <a:off x="7589520" y="2176272"/>
+            <a:ext cx="0" cy="128016"/>
+          </a:xfrm>
+          <a:prstGeom prst="line">
+            <a:avLst/>
+          </a:prstGeom>
+          <a:ln w="16510">
+            <a:solidFill>
+              <a:srgbClr val="B4C7D2"/>
+            </a:solidFill>
+          </a:ln>
+          <a:effectLst/>
+        </p:spPr>
+      </p:cxnSp>
+      <p:sp>
+        <p:nvSpPr>
+          <p:cNvPr id="14" name="C1-E23 text 12" descr="sci-ppt:o012"/>
           <p:cNvSpPr txBox="1"/>
           <p:nvPr/>
         </p:nvSpPr>
         <p:spPr>
           <a:xfrm>
-            <a:off x="5397552" y="4150886"/>
-            <a:ext cx="914400" cy="208407"/>
+            <a:off x="3474720" y="2317242"/>
+            <a:ext cx="1828800" cy="223900"/>
           </a:xfrm>
           <a:prstGeom prst="rect">
             <a:avLst/>
@@ -3346,7 +3465,135 @@
           </a:bodyPr>
           <a:lstStyle/>
           <a:p>
-            <a:pPr algn="l">
+            <a:pPr algn="ctr">
+              <a:spcAft>
+                <a:spcPts val="0"/>
+              </a:spcAft>
+            </a:pPr>
+            <a:r>
+              <a:rPr sz="1150" b="0" i="0">
+                <a:solidFill>
+                  <a:srgbClr val="B4C7D2"/>
+                </a:solidFill>
+                <a:latin typeface="Arial"/>
+              </a:rPr>
+              <a:t>L = 100 µm</a:t>
+            </a:r>
+          </a:p>
+        </p:txBody>
+      </p:sp>
+      <p:cxnSp>
+        <p:nvCxnSpPr>
+          <p:cNvPr id="15" name="C1-E23 line 13" descr="sci-ppt:o013"/>
+          <p:cNvCxnSpPr/>
+          <p:nvPr/>
+        </p:nvCxnSpPr>
+        <p:spPr>
+          <a:xfrm>
+            <a:off x="1188720" y="5029200"/>
+            <a:ext cx="6400800" cy="0"/>
+          </a:xfrm>
+          <a:prstGeom prst="line">
+            <a:avLst/>
+          </a:prstGeom>
+          <a:ln w="19050">
+            <a:solidFill>
+              <a:srgbClr val="B4C7D2"/>
+            </a:solidFill>
+          </a:ln>
+          <a:effectLst/>
+        </p:spPr>
+      </p:cxnSp>
+      <p:cxnSp>
+        <p:nvCxnSpPr>
+          <p:cNvPr id="16" name="C1-E23 line 14" descr="sci-ppt:o014"/>
+          <p:cNvCxnSpPr/>
+          <p:nvPr/>
+        </p:nvCxnSpPr>
+        <p:spPr>
+          <a:xfrm>
+            <a:off x="1188720" y="2743200"/>
+            <a:ext cx="0" cy="2286000"/>
+          </a:xfrm>
+          <a:prstGeom prst="line">
+            <a:avLst/>
+          </a:prstGeom>
+          <a:ln w="19050">
+            <a:solidFill>
+              <a:srgbClr val="B4C7D2"/>
+            </a:solidFill>
+          </a:ln>
+          <a:effectLst/>
+        </p:spPr>
+      </p:cxnSp>
+      <p:cxnSp>
+        <p:nvCxnSpPr>
+          <p:cNvPr id="17" name="C1-E23 line 15" descr="sci-ppt:o015"/>
+          <p:cNvCxnSpPr/>
+          <p:nvPr/>
+        </p:nvCxnSpPr>
+        <p:spPr>
+          <a:xfrm>
+            <a:off x="1188720" y="5029200"/>
+            <a:ext cx="0" cy="64008"/>
+          </a:xfrm>
+          <a:prstGeom prst="line">
+            <a:avLst/>
+          </a:prstGeom>
+          <a:ln w="12700">
+            <a:solidFill>
+              <a:srgbClr val="B4C7D2"/>
+            </a:solidFill>
+          </a:ln>
+          <a:effectLst/>
+        </p:spPr>
+      </p:cxnSp>
+      <p:cxnSp>
+        <p:nvCxnSpPr>
+          <p:cNvPr id="18" name="C1-E23 line 16" descr="sci-ppt:o016"/>
+          <p:cNvCxnSpPr/>
+          <p:nvPr/>
+        </p:nvCxnSpPr>
+        <p:spPr>
+          <a:xfrm>
+            <a:off x="1188720" y="2743200"/>
+            <a:ext cx="0" cy="2286000"/>
+          </a:xfrm>
+          <a:prstGeom prst="line">
+            <a:avLst/>
+          </a:prstGeom>
+          <a:ln w="7620">
+            <a:solidFill>
+              <a:srgbClr val="2E4756"/>
+            </a:solidFill>
+          </a:ln>
+          <a:effectLst/>
+        </p:spPr>
+      </p:cxnSp>
+      <p:sp>
+        <p:nvSpPr>
+          <p:cNvPr id="19" name="C1-E23 text 17" descr="sci-ppt:o017"/>
+          <p:cNvSpPr txBox="1"/>
+          <p:nvPr/>
+        </p:nvSpPr>
+        <p:spPr>
+          <a:xfrm>
+            <a:off x="731520" y="5111496"/>
+            <a:ext cx="914400" cy="208407"/>
+          </a:xfrm>
+          <a:prstGeom prst="rect">
+            <a:avLst/>
+          </a:prstGeom>
+          <a:noFill/>
+          <a:effectLst/>
+        </p:spPr>
+        <p:txBody>
+          <a:bodyPr wrap="none" lIns="18288" rIns="18288" tIns="18288" bIns="18288" anchor="t">
+            <a:spAutoFit/>
+          </a:bodyPr>
+          <a:lstStyle/>
+          <a:p>
+            <a:pPr algn="ctr">
               <a:spcAft>
                 <a:spcPts val="0"/>
               </a:spcAft>
@@ -3358,43 +3605,64 @@
                 </a:solidFill>
                 <a:latin typeface="Arial"/>
               </a:rPr>
-              <a:t>Π = 0.8 Π₀</a:t>
+              <a:t>0.00</a:t>
             </a:r>
           </a:p>
         </p:txBody>
       </p:sp>
       <p:cxnSp>
         <p:nvCxnSpPr>
-          <p:cNvPr id="6" name="C1-E23 line 4" descr="sci-ppt:o004"/>
+          <p:cNvPr id="20" name="C1-E23 line 18" descr="sci-ppt:o018"/>
           <p:cNvCxnSpPr/>
           <p:nvPr/>
         </p:nvCxnSpPr>
         <p:spPr>
-          <a:xfrm flipV="1">
-            <a:off x="1005840" y="2981925"/>
-            <a:ext cx="3698825" cy="2687355"/>
+          <a:xfrm>
+            <a:off x="2788920" y="5029200"/>
+            <a:ext cx="0" cy="64008"/>
           </a:xfrm>
           <a:prstGeom prst="line">
             <a:avLst/>
           </a:prstGeom>
-          <a:ln w="13970">
+          <a:ln w="12700">
             <a:solidFill>
               <a:srgbClr val="B4C7D2"/>
             </a:solidFill>
-            <a:prstDash val="dash"/>
           </a:ln>
           <a:effectLst/>
         </p:spPr>
       </p:cxnSp>
-      <p:sp>
-        <p:nvSpPr>
-          <p:cNvPr id="7" name="C1-E23 text 5" descr="sci-ppt:o005"/>
+      <p:cxnSp>
+        <p:nvCxnSpPr>
+          <p:cNvPr id="21" name="C1-E23 line 19" descr="sci-ppt:o019"/>
+          <p:cNvCxnSpPr/>
+          <p:nvPr/>
+        </p:nvCxnSpPr>
+        <p:spPr>
+          <a:xfrm>
+            <a:off x="2788920" y="2743200"/>
+            <a:ext cx="0" cy="2286000"/>
+          </a:xfrm>
+          <a:prstGeom prst="line">
+            <a:avLst/>
+          </a:prstGeom>
+          <a:ln w="7620">
+            <a:solidFill>
+              <a:srgbClr val="2E4756"/>
+            </a:solidFill>
+          </a:ln>
+          <a:effectLst/>
+        </p:spPr>
+      </p:cxnSp>
+      <p:sp>
+        <p:nvSpPr>
+          <p:cNvPr id="22" name="C1-E23 text 20" descr="sci-ppt:o020"/>
           <p:cNvSpPr txBox="1"/>
           <p:nvPr/>
         </p:nvSpPr>
         <p:spPr>
           <a:xfrm>
-            <a:off x="4741653" y="2863612"/>
+            <a:off x="2331720" y="5111496"/>
             <a:ext cx="914400" cy="208407"/>
           </a:xfrm>
           <a:prstGeom prst="rect">
@@ -3409,7 +3677,7 @@
           </a:bodyPr>
           <a:lstStyle/>
           <a:p>
-            <a:pPr algn="l">
+            <a:pPr algn="ctr">
               <a:spcAft>
                 <a:spcPts val="0"/>
               </a:spcAft>
@@ -3421,43 +3689,64 @@
                 </a:solidFill>
                 <a:latin typeface="Arial"/>
               </a:rPr>
-              <a:t>Π = 0.6 Π₀</a:t>
+              <a:t>0.25</a:t>
             </a:r>
           </a:p>
         </p:txBody>
       </p:sp>
       <p:cxnSp>
         <p:nvCxnSpPr>
-          <p:cNvPr id="8" name="C1-E23 line 6" descr="sci-ppt:o006"/>
+          <p:cNvPr id="23" name="C1-E23 line 21" descr="sci-ppt:o021"/>
           <p:cNvCxnSpPr/>
           <p:nvPr/>
         </p:nvCxnSpPr>
         <p:spPr>
-          <a:xfrm flipV="1">
-            <a:off x="1005840" y="1970454"/>
-            <a:ext cx="2687354" cy="3698826"/>
+          <a:xfrm>
+            <a:off x="4389120" y="5029200"/>
+            <a:ext cx="0" cy="64008"/>
           </a:xfrm>
           <a:prstGeom prst="line">
             <a:avLst/>
           </a:prstGeom>
-          <a:ln w="13970">
+          <a:ln w="12700">
             <a:solidFill>
               <a:srgbClr val="B4C7D2"/>
             </a:solidFill>
-            <a:prstDash val="dash"/>
           </a:ln>
           <a:effectLst/>
         </p:spPr>
       </p:cxnSp>
-      <p:sp>
-        <p:nvSpPr>
-          <p:cNvPr id="9" name="C1-E23 text 7" descr="sci-ppt:o007"/>
+      <p:cxnSp>
+        <p:nvCxnSpPr>
+          <p:cNvPr id="24" name="C1-E23 line 22" descr="sci-ppt:o022"/>
+          <p:cNvCxnSpPr/>
+          <p:nvPr/>
+        </p:nvCxnSpPr>
+        <p:spPr>
+          <a:xfrm>
+            <a:off x="4389120" y="2743200"/>
+            <a:ext cx="0" cy="2286000"/>
+          </a:xfrm>
+          <a:prstGeom prst="line">
+            <a:avLst/>
+          </a:prstGeom>
+          <a:ln w="7620">
+            <a:solidFill>
+              <a:srgbClr val="2E4756"/>
+            </a:solidFill>
+          </a:ln>
+          <a:effectLst/>
+        </p:spPr>
+      </p:cxnSp>
+      <p:sp>
+        <p:nvSpPr>
+          <p:cNvPr id="25" name="C1-E23 text 23" descr="sci-ppt:o023"/>
           <p:cNvSpPr txBox="1"/>
           <p:nvPr/>
         </p:nvSpPr>
         <p:spPr>
           <a:xfrm>
-            <a:off x="3720067" y="1842026"/>
+            <a:off x="3931920" y="5111496"/>
             <a:ext cx="914400" cy="208407"/>
           </a:xfrm>
           <a:prstGeom prst="rect">
@@ -3472,7 +3761,7 @@
           </a:bodyPr>
           <a:lstStyle/>
           <a:p>
-            <a:pPr algn="l">
+            <a:pPr algn="ctr">
               <a:spcAft>
                 <a:spcPts val="0"/>
               </a:spcAft>
@@ -3484,43 +3773,64 @@
                 </a:solidFill>
                 <a:latin typeface="Arial"/>
               </a:rPr>
-              <a:t>Π = 0.4 Π₀</a:t>
+              <a:t>0.50</a:t>
             </a:r>
           </a:p>
         </p:txBody>
       </p:sp>
       <p:cxnSp>
         <p:nvCxnSpPr>
-          <p:cNvPr id="10" name="C1-E23 line 8" descr="sci-ppt:o008"/>
+          <p:cNvPr id="26" name="C1-E23 line 24" descr="sci-ppt:o024"/>
           <p:cNvCxnSpPr/>
           <p:nvPr/>
         </p:nvCxnSpPr>
         <p:spPr>
-          <a:xfrm flipV="1">
-            <a:off x="1005840" y="1321049"/>
-            <a:ext cx="1412825" cy="4348231"/>
+          <a:xfrm>
+            <a:off x="5989320" y="5029200"/>
+            <a:ext cx="0" cy="64008"/>
           </a:xfrm>
           <a:prstGeom prst="line">
             <a:avLst/>
           </a:prstGeom>
-          <a:ln w="13970">
+          <a:ln w="12700">
             <a:solidFill>
               <a:srgbClr val="B4C7D2"/>
             </a:solidFill>
-            <a:prstDash val="dash"/>
           </a:ln>
           <a:effectLst/>
         </p:spPr>
       </p:cxnSp>
-      <p:sp>
-        <p:nvSpPr>
-          <p:cNvPr id="11" name="C1-E23 text 9" descr="sci-ppt:o009"/>
+      <p:cxnSp>
+        <p:nvCxnSpPr>
+          <p:cNvPr id="27" name="C1-E23 line 25" descr="sci-ppt:o025"/>
+          <p:cNvCxnSpPr/>
+          <p:nvPr/>
+        </p:nvCxnSpPr>
+        <p:spPr>
+          <a:xfrm>
+            <a:off x="5989320" y="2743200"/>
+            <a:ext cx="0" cy="2286000"/>
+          </a:xfrm>
+          <a:prstGeom prst="line">
+            <a:avLst/>
+          </a:prstGeom>
+          <a:ln w="7620">
+            <a:solidFill>
+              <a:srgbClr val="2E4756"/>
+            </a:solidFill>
+          </a:ln>
+          <a:effectLst/>
+        </p:spPr>
+      </p:cxnSp>
+      <p:sp>
+        <p:nvSpPr>
+          <p:cNvPr id="28" name="C1-E23 text 26" descr="sci-ppt:o026"/>
           <p:cNvSpPr txBox="1"/>
           <p:nvPr/>
         </p:nvSpPr>
         <p:spPr>
           <a:xfrm>
-            <a:off x="2432793" y="1186127"/>
+            <a:off x="5532120" y="5111496"/>
             <a:ext cx="914400" cy="208407"/>
           </a:xfrm>
           <a:prstGeom prst="rect">
@@ -3535,7 +3845,7 @@
           </a:bodyPr>
           <a:lstStyle/>
           <a:p>
-            <a:pPr algn="l">
+            <a:pPr algn="ctr">
               <a:spcAft>
                 <a:spcPts val="0"/>
               </a:spcAft>
@@ -3547,613 +3857,595 @@
                 </a:solidFill>
                 <a:latin typeface="Arial"/>
               </a:rPr>
-              <a:t>Π = 0.2 Π₀</a:t>
+              <a:t>0.75</a:t>
             </a:r>
           </a:p>
         </p:txBody>
       </p:sp>
       <p:cxnSp>
         <p:nvCxnSpPr>
-          <p:cNvPr id="12" name="C1-E23 line 10" descr="sci-ppt:o010"/>
+          <p:cNvPr id="29" name="C1-E23 line 27" descr="sci-ppt:o027"/>
           <p:cNvCxnSpPr/>
           <p:nvPr/>
         </p:nvCxnSpPr>
         <p:spPr>
           <a:xfrm>
-            <a:off x="1005840" y="5669280"/>
-            <a:ext cx="4572000" cy="0"/>
+            <a:off x="7589520" y="5029200"/>
+            <a:ext cx="0" cy="64008"/>
           </a:xfrm>
           <a:prstGeom prst="line">
             <a:avLst/>
           </a:prstGeom>
-          <a:ln w="50800">
+          <a:ln w="12700">
+            <a:solidFill>
+              <a:srgbClr val="B4C7D2"/>
+            </a:solidFill>
+          </a:ln>
+          <a:effectLst/>
+        </p:spPr>
+      </p:cxnSp>
+      <p:cxnSp>
+        <p:nvCxnSpPr>
+          <p:cNvPr id="30" name="C1-E23 line 28" descr="sci-ppt:o028"/>
+          <p:cNvCxnSpPr/>
+          <p:nvPr/>
+        </p:nvCxnSpPr>
+        <p:spPr>
+          <a:xfrm>
+            <a:off x="7589520" y="2743200"/>
+            <a:ext cx="0" cy="2286000"/>
+          </a:xfrm>
+          <a:prstGeom prst="line">
+            <a:avLst/>
+          </a:prstGeom>
+          <a:ln w="7620">
+            <a:solidFill>
+              <a:srgbClr val="2E4756"/>
+            </a:solidFill>
+          </a:ln>
+          <a:effectLst/>
+        </p:spPr>
+      </p:cxnSp>
+      <p:sp>
+        <p:nvSpPr>
+          <p:cNvPr id="31" name="C1-E23 text 29" descr="sci-ppt:o029"/>
+          <p:cNvSpPr txBox="1"/>
+          <p:nvPr/>
+        </p:nvSpPr>
+        <p:spPr>
+          <a:xfrm>
+            <a:off x="7132320" y="5111496"/>
+            <a:ext cx="914400" cy="208407"/>
+          </a:xfrm>
+          <a:prstGeom prst="rect">
+            <a:avLst/>
+          </a:prstGeom>
+          <a:noFill/>
+          <a:effectLst/>
+        </p:spPr>
+        <p:txBody>
+          <a:bodyPr wrap="none" lIns="18288" rIns="18288" tIns="18288" bIns="18288" anchor="t">
+            <a:spAutoFit/>
+          </a:bodyPr>
+          <a:lstStyle/>
+          <a:p>
+            <a:pPr algn="ctr">
+              <a:spcAft>
+                <a:spcPts val="0"/>
+              </a:spcAft>
+            </a:pPr>
+            <a:r>
+              <a:rPr sz="1050" b="0" i="0">
+                <a:solidFill>
+                  <a:srgbClr val="B4C7D2"/>
+                </a:solidFill>
+                <a:latin typeface="Arial"/>
+              </a:rPr>
+              <a:t>1.00</a:t>
+            </a:r>
+          </a:p>
+        </p:txBody>
+      </p:sp>
+      <p:cxnSp>
+        <p:nvCxnSpPr>
+          <p:cNvPr id="32" name="C1-E23 line 30" descr="sci-ppt:o030"/>
+          <p:cNvCxnSpPr/>
+          <p:nvPr/>
+        </p:nvCxnSpPr>
+        <p:spPr>
+          <a:xfrm>
+            <a:off x="1124712" y="5029200"/>
+            <a:ext cx="64008" cy="0"/>
+          </a:xfrm>
+          <a:prstGeom prst="line">
+            <a:avLst/>
+          </a:prstGeom>
+          <a:ln w="12700">
+            <a:solidFill>
+              <a:srgbClr val="B4C7D2"/>
+            </a:solidFill>
+          </a:ln>
+          <a:effectLst/>
+        </p:spPr>
+      </p:cxnSp>
+      <p:cxnSp>
+        <p:nvCxnSpPr>
+          <p:cNvPr id="33" name="C1-E23 line 31" descr="sci-ppt:o031"/>
+          <p:cNvCxnSpPr/>
+          <p:nvPr/>
+        </p:nvCxnSpPr>
+        <p:spPr>
+          <a:xfrm>
+            <a:off x="1124712" y="3990109"/>
+            <a:ext cx="64008" cy="0"/>
+          </a:xfrm>
+          <a:prstGeom prst="line">
+            <a:avLst/>
+          </a:prstGeom>
+          <a:ln w="12700">
+            <a:solidFill>
+              <a:srgbClr val="B4C7D2"/>
+            </a:solidFill>
+          </a:ln>
+          <a:effectLst/>
+        </p:spPr>
+      </p:cxnSp>
+      <p:cxnSp>
+        <p:nvCxnSpPr>
+          <p:cNvPr id="34" name="C1-E23 line 32" descr="sci-ppt:o032"/>
+          <p:cNvCxnSpPr/>
+          <p:nvPr/>
+        </p:nvCxnSpPr>
+        <p:spPr>
+          <a:xfrm>
+            <a:off x="1188720" y="3990109"/>
+            <a:ext cx="6400800" cy="0"/>
+          </a:xfrm>
+          <a:prstGeom prst="line">
+            <a:avLst/>
+          </a:prstGeom>
+          <a:ln w="7620">
+            <a:solidFill>
+              <a:srgbClr val="2E4756"/>
+            </a:solidFill>
+          </a:ln>
+          <a:effectLst/>
+        </p:spPr>
+      </p:cxnSp>
+      <p:sp>
+        <p:nvSpPr>
+          <p:cNvPr id="35" name="C1-E23 text 33" descr="sci-ppt:o033"/>
+          <p:cNvSpPr txBox="1"/>
+          <p:nvPr/>
+        </p:nvSpPr>
+        <p:spPr>
+          <a:xfrm>
+            <a:off x="320040" y="3907813"/>
+            <a:ext cx="777240" cy="208407"/>
+          </a:xfrm>
+          <a:prstGeom prst="rect">
+            <a:avLst/>
+          </a:prstGeom>
+          <a:noFill/>
+          <a:effectLst/>
+        </p:spPr>
+        <p:txBody>
+          <a:bodyPr wrap="none" lIns="18288" rIns="18288" tIns="18288" bIns="18288" anchor="t">
+            <a:spAutoFit/>
+          </a:bodyPr>
+          <a:lstStyle/>
+          <a:p>
+            <a:pPr algn="r">
+              <a:spcAft>
+                <a:spcPts val="0"/>
+              </a:spcAft>
+            </a:pPr>
+            <a:r>
+              <a:rPr sz="1050" b="0" i="0">
+                <a:solidFill>
+                  <a:srgbClr val="B4C7D2"/>
+                </a:solidFill>
+                <a:latin typeface="Arial"/>
+              </a:rPr>
+              <a:t>0.5</a:t>
+            </a:r>
+          </a:p>
+        </p:txBody>
+      </p:sp>
+      <p:cxnSp>
+        <p:nvCxnSpPr>
+          <p:cNvPr id="36" name="C1-E23 line 34" descr="sci-ppt:o034"/>
+          <p:cNvCxnSpPr/>
+          <p:nvPr/>
+        </p:nvCxnSpPr>
+        <p:spPr>
+          <a:xfrm>
+            <a:off x="1124712" y="2951018"/>
+            <a:ext cx="64008" cy="0"/>
+          </a:xfrm>
+          <a:prstGeom prst="line">
+            <a:avLst/>
+          </a:prstGeom>
+          <a:ln w="12700">
+            <a:solidFill>
+              <a:srgbClr val="B4C7D2"/>
+            </a:solidFill>
+          </a:ln>
+          <a:effectLst/>
+        </p:spPr>
+      </p:cxnSp>
+      <p:cxnSp>
+        <p:nvCxnSpPr>
+          <p:cNvPr id="37" name="C1-E23 line 35" descr="sci-ppt:o035"/>
+          <p:cNvCxnSpPr/>
+          <p:nvPr/>
+        </p:nvCxnSpPr>
+        <p:spPr>
+          <a:xfrm>
+            <a:off x="1188720" y="2951018"/>
+            <a:ext cx="6400800" cy="0"/>
+          </a:xfrm>
+          <a:prstGeom prst="line">
+            <a:avLst/>
+          </a:prstGeom>
+          <a:ln w="7620">
+            <a:solidFill>
+              <a:srgbClr val="2E4756"/>
+            </a:solidFill>
+          </a:ln>
+          <a:effectLst/>
+        </p:spPr>
+      </p:cxnSp>
+      <p:sp>
+        <p:nvSpPr>
+          <p:cNvPr id="38" name="C1-E23 text 36" descr="sci-ppt:o036"/>
+          <p:cNvSpPr txBox="1"/>
+          <p:nvPr/>
+        </p:nvSpPr>
+        <p:spPr>
+          <a:xfrm>
+            <a:off x="320040" y="2868722"/>
+            <a:ext cx="777240" cy="208407"/>
+          </a:xfrm>
+          <a:prstGeom prst="rect">
+            <a:avLst/>
+          </a:prstGeom>
+          <a:noFill/>
+          <a:effectLst/>
+        </p:spPr>
+        <p:txBody>
+          <a:bodyPr wrap="none" lIns="18288" rIns="18288" tIns="18288" bIns="18288" anchor="t">
+            <a:spAutoFit/>
+          </a:bodyPr>
+          <a:lstStyle/>
+          <a:p>
+            <a:pPr algn="r">
+              <a:spcAft>
+                <a:spcPts val="0"/>
+              </a:spcAft>
+            </a:pPr>
+            <a:r>
+              <a:rPr sz="1050" b="0" i="0">
+                <a:solidFill>
+                  <a:srgbClr val="B4C7D2"/>
+                </a:solidFill>
+                <a:latin typeface="Arial"/>
+              </a:rPr>
+              <a:t>1.0</a:t>
+            </a:r>
+          </a:p>
+        </p:txBody>
+      </p:sp>
+      <p:sp>
+        <p:nvSpPr>
+          <p:cNvPr id="39" name="C1-E23 text 37" descr="sci-ppt:o037"/>
+          <p:cNvSpPr txBox="1"/>
+          <p:nvPr/>
+        </p:nvSpPr>
+        <p:spPr>
+          <a:xfrm>
+            <a:off x="1188720" y="5312664"/>
+            <a:ext cx="6400800" cy="231648"/>
+          </a:xfrm>
+          <a:prstGeom prst="rect">
+            <a:avLst/>
+          </a:prstGeom>
+          <a:noFill/>
+          <a:effectLst/>
+        </p:spPr>
+        <p:txBody>
+          <a:bodyPr wrap="none" lIns="18288" rIns="18288" tIns="18288" bIns="18288" anchor="t">
+            <a:spAutoFit/>
+          </a:bodyPr>
+          <a:lstStyle/>
+          <a:p>
+            <a:pPr algn="ctr">
+              <a:spcAft>
+                <a:spcPts val="0"/>
+              </a:spcAft>
+            </a:pPr>
+            <a:r>
+              <a:rPr sz="1200" b="0" i="0">
+                <a:solidFill>
+                  <a:srgbClr val="E7F0F3"/>
+                </a:solidFill>
+                <a:latin typeface="Arial"/>
+              </a:rPr>
+              <a:t>z / L</a:t>
+            </a:r>
+          </a:p>
+        </p:txBody>
+      </p:sp>
+      <p:sp>
+        <p:nvSpPr>
+          <p:cNvPr id="40" name="C1-E23 text 38" descr="sci-ppt:o038"/>
+          <p:cNvSpPr txBox="1"/>
+          <p:nvPr/>
+        </p:nvSpPr>
+        <p:spPr>
+          <a:xfrm>
+            <a:off x="640080" y="2395728"/>
+            <a:ext cx="6400800" cy="231648"/>
+          </a:xfrm>
+          <a:prstGeom prst="rect">
+            <a:avLst/>
+          </a:prstGeom>
+          <a:noFill/>
+          <a:effectLst/>
+        </p:spPr>
+        <p:txBody>
+          <a:bodyPr wrap="none" lIns="18288" rIns="18288" tIns="18288" bIns="18288" anchor="t">
+            <a:spAutoFit/>
+          </a:bodyPr>
+          <a:lstStyle/>
+          <a:p>
+            <a:pPr algn="l">
+              <a:spcAft>
+                <a:spcPts val="0"/>
+              </a:spcAft>
+            </a:pPr>
+            <a:r>
+              <a:rPr sz="1200" b="0" i="0">
+                <a:solidFill>
+                  <a:srgbClr val="E7F0F3"/>
+                </a:solidFill>
+                <a:latin typeface="Arial"/>
+              </a:rPr>
+              <a:t>Π / Π₀</a:t>
+            </a:r>
+          </a:p>
+        </p:txBody>
+      </p:sp>
+      <p:sp>
+        <p:nvSpPr>
+          <p:cNvPr id="41" name="C1-E23 polygon 39" descr="sci-ppt:o039"/>
+          <p:cNvSpPr/>
+          <p:nvPr/>
+        </p:nvSpPr>
+        <p:spPr>
+          <a:xfrm>
+            <a:off x="1188720" y="2951018"/>
+            <a:ext cx="6400800" cy="2078182"/>
+          </a:xfrm>
+          <a:custGeom>
+            <a:avLst/>
+            <a:gdLst/>
+            <a:ahLst/>
+            <a:cxnLst/>
+            <a:rect l="l" t="t" r="r" b="b"/>
+            <a:pathLst>
+              <a:path w="6400800" h="2078182">
+                <a:moveTo>
+                  <a:pt x="0" y="0"/>
+                </a:moveTo>
+                <a:lnTo>
+                  <a:pt x="130628" y="42412"/>
+                </a:lnTo>
+                <a:lnTo>
+                  <a:pt x="261257" y="84823"/>
+                </a:lnTo>
+                <a:lnTo>
+                  <a:pt x="391885" y="127235"/>
+                </a:lnTo>
+                <a:lnTo>
+                  <a:pt x="522514" y="169647"/>
+                </a:lnTo>
+                <a:lnTo>
+                  <a:pt x="653142" y="212059"/>
+                </a:lnTo>
+                <a:lnTo>
+                  <a:pt x="783771" y="254471"/>
+                </a:lnTo>
+                <a:lnTo>
+                  <a:pt x="914400" y="296883"/>
+                </a:lnTo>
+                <a:lnTo>
+                  <a:pt x="1045028" y="339295"/>
+                </a:lnTo>
+                <a:lnTo>
+                  <a:pt x="1175657" y="381707"/>
+                </a:lnTo>
+                <a:lnTo>
+                  <a:pt x="1306285" y="424118"/>
+                </a:lnTo>
+                <a:lnTo>
+                  <a:pt x="1436914" y="466530"/>
+                </a:lnTo>
+                <a:lnTo>
+                  <a:pt x="1567542" y="508942"/>
+                </a:lnTo>
+                <a:lnTo>
+                  <a:pt x="1698171" y="551354"/>
+                </a:lnTo>
+                <a:lnTo>
+                  <a:pt x="1828800" y="593766"/>
+                </a:lnTo>
+                <a:lnTo>
+                  <a:pt x="1959428" y="636178"/>
+                </a:lnTo>
+                <a:lnTo>
+                  <a:pt x="2090057" y="678590"/>
+                </a:lnTo>
+                <a:lnTo>
+                  <a:pt x="2220685" y="721002"/>
+                </a:lnTo>
+                <a:lnTo>
+                  <a:pt x="2351314" y="763413"/>
+                </a:lnTo>
+                <a:lnTo>
+                  <a:pt x="2481942" y="805825"/>
+                </a:lnTo>
+                <a:lnTo>
+                  <a:pt x="2612571" y="848237"/>
+                </a:lnTo>
+                <a:lnTo>
+                  <a:pt x="2743200" y="890649"/>
+                </a:lnTo>
+                <a:lnTo>
+                  <a:pt x="2873828" y="933061"/>
+                </a:lnTo>
+                <a:lnTo>
+                  <a:pt x="3004457" y="975473"/>
+                </a:lnTo>
+                <a:lnTo>
+                  <a:pt x="3135085" y="1017885"/>
+                </a:lnTo>
+                <a:lnTo>
+                  <a:pt x="3265714" y="1060297"/>
+                </a:lnTo>
+                <a:lnTo>
+                  <a:pt x="3396342" y="1102708"/>
+                </a:lnTo>
+                <a:lnTo>
+                  <a:pt x="3526971" y="1145120"/>
+                </a:lnTo>
+                <a:lnTo>
+                  <a:pt x="3657600" y="1187532"/>
+                </a:lnTo>
+                <a:lnTo>
+                  <a:pt x="3788228" y="1229944"/>
+                </a:lnTo>
+                <a:lnTo>
+                  <a:pt x="3918857" y="1272356"/>
+                </a:lnTo>
+                <a:lnTo>
+                  <a:pt x="4049485" y="1314768"/>
+                </a:lnTo>
+                <a:lnTo>
+                  <a:pt x="4180114" y="1357180"/>
+                </a:lnTo>
+                <a:lnTo>
+                  <a:pt x="4310742" y="1399592"/>
+                </a:lnTo>
+                <a:lnTo>
+                  <a:pt x="4441371" y="1442003"/>
+                </a:lnTo>
+                <a:lnTo>
+                  <a:pt x="4572000" y="1484415"/>
+                </a:lnTo>
+                <a:lnTo>
+                  <a:pt x="4702628" y="1526827"/>
+                </a:lnTo>
+                <a:lnTo>
+                  <a:pt x="4833257" y="1569239"/>
+                </a:lnTo>
+                <a:lnTo>
+                  <a:pt x="4963885" y="1611651"/>
+                </a:lnTo>
+                <a:lnTo>
+                  <a:pt x="5094514" y="1654063"/>
+                </a:lnTo>
+                <a:lnTo>
+                  <a:pt x="5225142" y="1696475"/>
+                </a:lnTo>
+                <a:lnTo>
+                  <a:pt x="5355771" y="1738887"/>
+                </a:lnTo>
+                <a:lnTo>
+                  <a:pt x="5486400" y="1781298"/>
+                </a:lnTo>
+                <a:lnTo>
+                  <a:pt x="5617028" y="1823710"/>
+                </a:lnTo>
+                <a:lnTo>
+                  <a:pt x="5747657" y="1866122"/>
+                </a:lnTo>
+                <a:lnTo>
+                  <a:pt x="5878285" y="1908534"/>
+                </a:lnTo>
+                <a:lnTo>
+                  <a:pt x="6008914" y="1950946"/>
+                </a:lnTo>
+                <a:lnTo>
+                  <a:pt x="6139542" y="1993358"/>
+                </a:lnTo>
+                <a:lnTo>
+                  <a:pt x="6270171" y="2035770"/>
+                </a:lnTo>
+                <a:lnTo>
+                  <a:pt x="6400800" y="2078182"/>
+                </a:lnTo>
+              </a:path>
+            </a:pathLst>
+          </a:custGeom>
+          <a:noFill/>
+          <a:ln w="40640">
             <a:solidFill>
               <a:srgbClr val="F2B880"/>
             </a:solidFill>
           </a:ln>
           <a:effectLst/>
         </p:spPr>
-      </p:cxnSp>
-      <p:sp>
-        <p:nvSpPr>
-          <p:cNvPr id="13" name="C1-E23 text 11" descr="sci-ppt:o011"/>
-          <p:cNvSpPr txBox="1"/>
+        <p:txBody>
+          <a:bodyPr rtlCol="0" anchor="ctr"/>
+          <a:lstStyle/>
+          <a:p>
+            <a:pPr algn="ctr"/>
+          </a:p>
+        </p:txBody>
+      </p:sp>
+      <p:sp>
+        <p:nvSpPr>
+          <p:cNvPr id="42" name="C1-E23 ellipse 40" descr="sci-ppt:o040"/>
+          <p:cNvSpPr/>
           <p:nvPr/>
         </p:nvSpPr>
         <p:spPr>
           <a:xfrm>
-            <a:off x="1920240" y="5742432"/>
-            <a:ext cx="2926080" cy="239395"/>
-          </a:xfrm>
-          <a:prstGeom prst="rect">
-            <a:avLst/>
-          </a:prstGeom>
-          <a:noFill/>
-          <a:effectLst/>
-        </p:spPr>
-        <p:txBody>
-          <a:bodyPr wrap="none" lIns="18288" rIns="18288" tIns="18288" bIns="18288" anchor="t">
-            <a:spAutoFit/>
-          </a:bodyPr>
-          <a:lstStyle/>
-          <a:p>
-            <a:pPr algn="l">
-              <a:spcAft>
-                <a:spcPts val="0"/>
-              </a:spcAft>
-            </a:pPr>
-            <a:r>
-              <a:rPr sz="1250" b="1" i="0">
-                <a:solidFill>
-                  <a:srgbClr val="F2B880"/>
-                </a:solidFill>
-                <a:latin typeface="Arial"/>
-              </a:rPr>
-              <a:t>driven boundary: Π = Π₀</a:t>
-            </a:r>
-          </a:p>
-        </p:txBody>
-      </p:sp>
-      <p:cxnSp>
-        <p:nvCxnSpPr>
-          <p:cNvPr id="14" name="C1-E23 line 12" descr="sci-ppt:o012"/>
-          <p:cNvCxnSpPr/>
-          <p:nvPr/>
-        </p:nvCxnSpPr>
-        <p:spPr>
-          <a:xfrm flipV="1">
-            <a:off x="1005840" y="1097280"/>
-            <a:ext cx="0" cy="4572000"/>
-          </a:xfrm>
-          <a:prstGeom prst="line">
-            <a:avLst/>
-          </a:prstGeom>
-          <a:ln w="50800">
+            <a:off x="1115568" y="2877866"/>
+            <a:ext cx="146304" cy="146304"/>
+          </a:xfrm>
+          <a:prstGeom prst="ellipse">
+            <a:avLst/>
+          </a:prstGeom>
+          <a:solidFill>
+            <a:srgbClr val="F2B880"/>
+          </a:solidFill>
+          <a:ln w="12700">
             <a:solidFill>
-              <a:srgbClr val="8EDBD4"/>
+              <a:srgbClr val="F2B880"/>
             </a:solidFill>
           </a:ln>
           <a:effectLst/>
         </p:spPr>
-      </p:cxnSp>
-      <p:sp>
-        <p:nvSpPr>
-          <p:cNvPr id="15" name="C1-E23 text 13" descr="sci-ppt:o013"/>
-          <p:cNvSpPr txBox="1"/>
-          <p:nvPr/>
-        </p:nvSpPr>
-        <p:spPr>
-          <a:xfrm>
-            <a:off x="1097280" y="777240"/>
-            <a:ext cx="3108960" cy="239395"/>
-          </a:xfrm>
-          <a:prstGeom prst="rect">
-            <a:avLst/>
-          </a:prstGeom>
-          <a:noFill/>
-          <a:effectLst/>
-        </p:spPr>
-        <p:txBody>
-          <a:bodyPr wrap="none" lIns="18288" rIns="18288" tIns="18288" bIns="18288" anchor="t">
-            <a:spAutoFit/>
-          </a:bodyPr>
-          <a:lstStyle/>
-          <a:p>
-            <a:pPr algn="l">
-              <a:spcAft>
-                <a:spcPts val="0"/>
-              </a:spcAft>
-            </a:pPr>
-            <a:r>
-              <a:rPr sz="1250" b="1" i="0">
-                <a:solidFill>
-                  <a:srgbClr val="8EDBD4"/>
-                </a:solidFill>
-                <a:latin typeface="Arial"/>
-              </a:rPr>
-              <a:t>free boundary: Π = 0</a:t>
-            </a:r>
-          </a:p>
-        </p:txBody>
-      </p:sp>
-      <p:sp>
-        <p:nvSpPr>
-          <p:cNvPr id="16" name="C1-E23 polygon 14" descr="sci-ppt:o014"/>
+        <p:txBody>
+          <a:bodyPr rtlCol="0" anchor="ctr"/>
+          <a:lstStyle/>
+          <a:p>
+            <a:pPr algn="ctr"/>
+          </a:p>
+        </p:txBody>
+      </p:sp>
+      <p:sp>
+        <p:nvSpPr>
+          <p:cNvPr id="43" name="C1-E23 ellipse 41" descr="sci-ppt:o041"/>
           <p:cNvSpPr/>
           <p:nvPr/>
         </p:nvSpPr>
         <p:spPr>
           <a:xfrm>
-            <a:off x="1169815" y="4584321"/>
-            <a:ext cx="920983" cy="920983"/>
-          </a:xfrm>
-          <a:custGeom>
-            <a:avLst/>
-            <a:gdLst/>
-            <a:ahLst/>
-            <a:cxnLst/>
-            <a:rect l="l" t="t" r="r" b="b"/>
-            <a:pathLst>
-              <a:path w="920983" h="920983">
-                <a:moveTo>
-                  <a:pt x="920983" y="920983"/>
-                </a:moveTo>
-                <a:lnTo>
-                  <a:pt x="907598" y="848837"/>
-                </a:lnTo>
-                <a:lnTo>
-                  <a:pt x="889421" y="777748"/>
-                </a:lnTo>
-                <a:lnTo>
-                  <a:pt x="866534" y="708032"/>
-                </a:lnTo>
-                <a:lnTo>
-                  <a:pt x="839038" y="640001"/>
-                </a:lnTo>
-                <a:lnTo>
-                  <a:pt x="807057" y="573960"/>
-                </a:lnTo>
-                <a:lnTo>
-                  <a:pt x="770734" y="510205"/>
-                </a:lnTo>
-                <a:lnTo>
-                  <a:pt x="730231" y="449019"/>
-                </a:lnTo>
-                <a:lnTo>
-                  <a:pt x="685729" y="390678"/>
-                </a:lnTo>
-                <a:lnTo>
-                  <a:pt x="637427" y="335441"/>
-                </a:lnTo>
-                <a:lnTo>
-                  <a:pt x="585542" y="283556"/>
-                </a:lnTo>
-                <a:lnTo>
-                  <a:pt x="530305" y="235254"/>
-                </a:lnTo>
-                <a:lnTo>
-                  <a:pt x="471964" y="190752"/>
-                </a:lnTo>
-                <a:lnTo>
-                  <a:pt x="410778" y="150249"/>
-                </a:lnTo>
-                <a:lnTo>
-                  <a:pt x="347023" y="113926"/>
-                </a:lnTo>
-                <a:lnTo>
-                  <a:pt x="280982" y="81945"/>
-                </a:lnTo>
-                <a:lnTo>
-                  <a:pt x="212951" y="54449"/>
-                </a:lnTo>
-                <a:lnTo>
-                  <a:pt x="143235" y="31562"/>
-                </a:lnTo>
-                <a:lnTo>
-                  <a:pt x="72146" y="13385"/>
-                </a:lnTo>
-                <a:lnTo>
-                  <a:pt x="0" y="0"/>
-                </a:lnTo>
-              </a:path>
-            </a:pathLst>
-          </a:custGeom>
-          <a:noFill/>
-          <a:ln w="15240">
-            <a:solidFill>
-              <a:srgbClr val="F2B880">
-                <a:alpha val="70000"/>
-              </a:srgbClr>
-            </a:solidFill>
-          </a:ln>
-          <a:effectLst/>
-        </p:spPr>
-        <p:txBody>
-          <a:bodyPr rtlCol="0" anchor="ctr"/>
-          <a:lstStyle/>
-          <a:p>
-            <a:pPr algn="ctr"/>
-          </a:p>
-        </p:txBody>
-      </p:sp>
-      <p:cxnSp>
-        <p:nvCxnSpPr>
-          <p:cNvPr id="17" name="C1-E23 arrow 15" descr="sci-ppt:o015"/>
-          <p:cNvCxnSpPr/>
-          <p:nvPr/>
-        </p:nvCxnSpPr>
-        <p:spPr>
-          <a:xfrm flipH="1" flipV="1">
-            <a:off x="1240263" y="4443583"/>
-            <a:ext cx="460134" cy="376218"/>
-          </a:xfrm>
-          <a:prstGeom prst="line">
-            <a:avLst/>
-          </a:prstGeom>
-          <a:ln w="38100">
-            <a:solidFill>
-              <a:srgbClr val="F2B880"/>
-            </a:solidFill>
-            <a:headEnd type="none" w="med" len="med"/>
-            <a:tailEnd type="triangle" w="med" len="med"/>
-          </a:ln>
-          <a:effectLst/>
-        </p:spPr>
-      </p:cxnSp>
-      <p:sp>
-        <p:nvSpPr>
-          <p:cNvPr id="18" name="C1-E23 polygon 16" descr="sci-ppt:o016"/>
-          <p:cNvSpPr/>
-          <p:nvPr/>
-        </p:nvSpPr>
-        <p:spPr>
-          <a:xfrm>
-            <a:off x="1333790" y="3499362"/>
-            <a:ext cx="1841967" cy="1841967"/>
-          </a:xfrm>
-          <a:custGeom>
-            <a:avLst/>
-            <a:gdLst/>
-            <a:ahLst/>
-            <a:cxnLst/>
-            <a:rect l="l" t="t" r="r" b="b"/>
-            <a:pathLst>
-              <a:path w="1841967" h="1841967">
-                <a:moveTo>
-                  <a:pt x="1841967" y="1841967"/>
-                </a:moveTo>
-                <a:lnTo>
-                  <a:pt x="1815197" y="1697675"/>
-                </a:lnTo>
-                <a:lnTo>
-                  <a:pt x="1778843" y="1555496"/>
-                </a:lnTo>
-                <a:lnTo>
-                  <a:pt x="1733068" y="1416064"/>
-                </a:lnTo>
-                <a:lnTo>
-                  <a:pt x="1678077" y="1280003"/>
-                </a:lnTo>
-                <a:lnTo>
-                  <a:pt x="1614115" y="1147921"/>
-                </a:lnTo>
-                <a:lnTo>
-                  <a:pt x="1541468" y="1020410"/>
-                </a:lnTo>
-                <a:lnTo>
-                  <a:pt x="1460462" y="898039"/>
-                </a:lnTo>
-                <a:lnTo>
-                  <a:pt x="1371458" y="781356"/>
-                </a:lnTo>
-                <a:lnTo>
-                  <a:pt x="1274855" y="670882"/>
-                </a:lnTo>
-                <a:lnTo>
-                  <a:pt x="1171085" y="567112"/>
-                </a:lnTo>
-                <a:lnTo>
-                  <a:pt x="1060611" y="470509"/>
-                </a:lnTo>
-                <a:lnTo>
-                  <a:pt x="943928" y="381505"/>
-                </a:lnTo>
-                <a:lnTo>
-                  <a:pt x="821557" y="300499"/>
-                </a:lnTo>
-                <a:lnTo>
-                  <a:pt x="694046" y="227852"/>
-                </a:lnTo>
-                <a:lnTo>
-                  <a:pt x="561964" y="163890"/>
-                </a:lnTo>
-                <a:lnTo>
-                  <a:pt x="425903" y="108899"/>
-                </a:lnTo>
-                <a:lnTo>
-                  <a:pt x="286471" y="63124"/>
-                </a:lnTo>
-                <a:lnTo>
-                  <a:pt x="144292" y="26770"/>
-                </a:lnTo>
-                <a:lnTo>
-                  <a:pt x="0" y="0"/>
-                </a:lnTo>
-              </a:path>
-            </a:pathLst>
-          </a:custGeom>
-          <a:noFill/>
-          <a:ln w="15240">
-            <a:solidFill>
-              <a:srgbClr val="F2B880">
-                <a:alpha val="70000"/>
-              </a:srgbClr>
-            </a:solidFill>
-          </a:ln>
-          <a:effectLst/>
-        </p:spPr>
-        <p:txBody>
-          <a:bodyPr rtlCol="0" anchor="ctr"/>
-          <a:lstStyle/>
-          <a:p>
-            <a:pPr algn="ctr"/>
-          </a:p>
-        </p:txBody>
-      </p:sp>
-      <p:cxnSp>
-        <p:nvCxnSpPr>
-          <p:cNvPr id="19" name="C1-E23 arrow 17" descr="sci-ppt:o017"/>
-          <p:cNvCxnSpPr/>
-          <p:nvPr/>
-        </p:nvCxnSpPr>
-        <p:spPr>
-          <a:xfrm flipH="1" flipV="1">
-            <a:off x="2164888" y="3782214"/>
-            <a:ext cx="230067" cy="188109"/>
-          </a:xfrm>
-          <a:prstGeom prst="line">
-            <a:avLst/>
-          </a:prstGeom>
-          <a:ln w="38100">
-            <a:solidFill>
-              <a:srgbClr val="F2B880"/>
-            </a:solidFill>
-            <a:headEnd type="none" w="med" len="med"/>
-            <a:tailEnd type="triangle" w="med" len="med"/>
-          </a:ln>
-          <a:effectLst/>
-        </p:spPr>
-      </p:cxnSp>
-      <p:sp>
-        <p:nvSpPr>
-          <p:cNvPr id="20" name="C1-E23 polygon 18" descr="sci-ppt:o018"/>
-          <p:cNvSpPr/>
-          <p:nvPr/>
-        </p:nvSpPr>
-        <p:spPr>
-          <a:xfrm>
-            <a:off x="1497766" y="2414403"/>
-            <a:ext cx="2762950" cy="2762950"/>
-          </a:xfrm>
-          <a:custGeom>
-            <a:avLst/>
-            <a:gdLst/>
-            <a:ahLst/>
-            <a:cxnLst/>
-            <a:rect l="l" t="t" r="r" b="b"/>
-            <a:pathLst>
-              <a:path w="2762950" h="2762950">
-                <a:moveTo>
-                  <a:pt x="2762950" y="2762950"/>
-                </a:moveTo>
-                <a:lnTo>
-                  <a:pt x="2722795" y="2546513"/>
-                </a:lnTo>
-                <a:lnTo>
-                  <a:pt x="2668264" y="2333244"/>
-                </a:lnTo>
-                <a:lnTo>
-                  <a:pt x="2599602" y="2124096"/>
-                </a:lnTo>
-                <a:lnTo>
-                  <a:pt x="2517114" y="1920004"/>
-                </a:lnTo>
-                <a:lnTo>
-                  <a:pt x="2421171" y="1721882"/>
-                </a:lnTo>
-                <a:lnTo>
-                  <a:pt x="2312202" y="1530615"/>
-                </a:lnTo>
-                <a:lnTo>
-                  <a:pt x="2190692" y="1347059"/>
-                </a:lnTo>
-                <a:lnTo>
-                  <a:pt x="2057187" y="1172034"/>
-                </a:lnTo>
-                <a:lnTo>
-                  <a:pt x="1912282" y="1006323"/>
-                </a:lnTo>
-                <a:lnTo>
-                  <a:pt x="1756627" y="850668"/>
-                </a:lnTo>
-                <a:lnTo>
-                  <a:pt x="1590916" y="705763"/>
-                </a:lnTo>
-                <a:lnTo>
-                  <a:pt x="1415891" y="572258"/>
-                </a:lnTo>
-                <a:lnTo>
-                  <a:pt x="1232335" y="450748"/>
-                </a:lnTo>
-                <a:lnTo>
-                  <a:pt x="1041068" y="341779"/>
-                </a:lnTo>
-                <a:lnTo>
-                  <a:pt x="842946" y="245836"/>
-                </a:lnTo>
-                <a:lnTo>
-                  <a:pt x="638854" y="163348"/>
-                </a:lnTo>
-                <a:lnTo>
-                  <a:pt x="429706" y="94686"/>
-                </a:lnTo>
-                <a:lnTo>
-                  <a:pt x="216437" y="40155"/>
-                </a:lnTo>
-                <a:lnTo>
-                  <a:pt x="0" y="0"/>
-                </a:lnTo>
-              </a:path>
-            </a:pathLst>
-          </a:custGeom>
-          <a:noFill/>
-          <a:ln w="15240">
-            <a:solidFill>
-              <a:srgbClr val="F2B880">
-                <a:alpha val="70000"/>
-              </a:srgbClr>
-            </a:solidFill>
-          </a:ln>
-          <a:effectLst/>
-        </p:spPr>
-        <p:txBody>
-          <a:bodyPr rtlCol="0" anchor="ctr"/>
-          <a:lstStyle/>
-          <a:p>
-            <a:pPr algn="ctr"/>
-          </a:p>
-        </p:txBody>
-      </p:sp>
-      <p:cxnSp>
-        <p:nvCxnSpPr>
-          <p:cNvPr id="21" name="C1-E23 arrow 19" descr="sci-ppt:o019"/>
-          <p:cNvCxnSpPr/>
-          <p:nvPr/>
-        </p:nvCxnSpPr>
-        <p:spPr>
-          <a:xfrm flipH="1" flipV="1">
-            <a:off x="2936135" y="2995439"/>
-            <a:ext cx="153378" cy="125406"/>
-          </a:xfrm>
-          <a:prstGeom prst="line">
-            <a:avLst/>
-          </a:prstGeom>
-          <a:ln w="38100">
-            <a:solidFill>
-              <a:srgbClr val="F2B880"/>
-            </a:solidFill>
-            <a:headEnd type="none" w="med" len="med"/>
-            <a:tailEnd type="triangle" w="med" len="med"/>
-          </a:ln>
-          <a:effectLst/>
-        </p:spPr>
-      </p:cxnSp>
-      <p:sp>
-        <p:nvSpPr>
-          <p:cNvPr id="22" name="C1-E23 text 20" descr="sci-ppt:o020"/>
-          <p:cNvSpPr txBox="1"/>
-          <p:nvPr/>
-        </p:nvSpPr>
-        <p:spPr>
-          <a:xfrm>
-            <a:off x="6858000" y="1005840"/>
-            <a:ext cx="4937760" cy="278130"/>
-          </a:xfrm>
-          <a:prstGeom prst="rect">
-            <a:avLst/>
-          </a:prstGeom>
-          <a:noFill/>
-          <a:effectLst/>
-        </p:spPr>
-        <p:txBody>
-          <a:bodyPr wrap="none" lIns="18288" rIns="18288" tIns="18288" bIns="18288" anchor="t">
-            <a:spAutoFit/>
-          </a:bodyPr>
-          <a:lstStyle/>
-          <a:p>
-            <a:pPr algn="l">
-              <a:spcAft>
-                <a:spcPts val="0"/>
-              </a:spcAft>
-            </a:pPr>
-            <a:r>
-              <a:rPr sz="1500" b="1" i="0">
-                <a:solidFill>
-                  <a:srgbClr val="8EDBD4"/>
-                </a:solidFill>
-                <a:latin typeface="Arial"/>
-              </a:rPr>
-              <a:t>Reduced model: ∇²Π = 0</a:t>
-            </a:r>
-          </a:p>
-        </p:txBody>
-      </p:sp>
-      <p:sp>
-        <p:nvSpPr>
-          <p:cNvPr id="23" name="C1-E23 text 21" descr="sci-ppt:o021"/>
-          <p:cNvSpPr txBox="1"/>
-          <p:nvPr/>
-        </p:nvSpPr>
-        <p:spPr>
-          <a:xfrm>
-            <a:off x="7059168" y="1508760"/>
-            <a:ext cx="4736592" cy="433070"/>
-          </a:xfrm>
-          <a:prstGeom prst="rect">
-            <a:avLst/>
-          </a:prstGeom>
-          <a:noFill/>
-          <a:effectLst/>
-        </p:spPr>
-        <p:txBody>
-          <a:bodyPr wrap="none" lIns="18288" rIns="18288" tIns="18288" bIns="18288" anchor="t">
-            <a:spAutoFit/>
-          </a:bodyPr>
-          <a:lstStyle/>
-          <a:p>
-            <a:pPr algn="l">
-              <a:spcAft>
-                <a:spcPts val="0"/>
-              </a:spcAft>
-            </a:pPr>
-            <a:r>
-              <a:rPr sz="1250" b="0" i="0">
-                <a:solidFill>
-                  <a:srgbClr val="E7F0F3"/>
-                </a:solidFill>
-                <a:latin typeface="Arial"/>
-              </a:rPr>
-              <a:t>Incompressible short event: ∇·Δu = 0 and Δu ≃ −∇Π/ρ give</a:t>
-            </a:r>
-          </a:p>
-          <a:p>
-            <a:pPr algn="l">
-              <a:spcAft>
-                <a:spcPts val="0"/>
-              </a:spcAft>
-            </a:pPr>
-            <a:r>
-              <a:rPr sz="1250" b="0" i="0">
-                <a:solidFill>
-                  <a:srgbClr val="E7F0F3"/>
-                </a:solidFill>
-                <a:latin typeface="Arial"/>
-              </a:rPr>
-              <a:t>Laplace's equation for Π.</a:t>
-            </a:r>
-          </a:p>
-        </p:txBody>
-      </p:sp>
-      <p:sp>
-        <p:nvSpPr>
-          <p:cNvPr id="24" name="C1-E23 ellipse 22" descr="sci-ppt:o022"/>
-          <p:cNvSpPr/>
-          <p:nvPr/>
-        </p:nvSpPr>
-        <p:spPr>
-          <a:xfrm>
-            <a:off x="6890004" y="1566037"/>
-            <a:ext cx="82296" cy="82296"/>
+            <a:off x="7516368" y="4956048"/>
+            <a:ext cx="146304" cy="146304"/>
           </a:xfrm>
           <a:prstGeom prst="ellipse">
             <a:avLst/>
@@ -4178,14 +4470,14 @@
       </p:sp>
       <p:sp>
         <p:nvSpPr>
-          <p:cNvPr id="25" name="C1-E23 text 23" descr="sci-ppt:o023"/>
+          <p:cNvPr id="44" name="C1-E23 text 42" descr="sci-ppt:o042"/>
           <p:cNvSpPr txBox="1"/>
           <p:nvPr/>
         </p:nvSpPr>
         <p:spPr>
           <a:xfrm>
-            <a:off x="7059168" y="1987549"/>
-            <a:ext cx="4736592" cy="626745"/>
+            <a:off x="3566160" y="3441469"/>
+            <a:ext cx="2743200" cy="247142"/>
           </a:xfrm>
           <a:prstGeom prst="rect">
             <a:avLst/>
@@ -4205,15 +4497,71 @@
               </a:spcAft>
             </a:pPr>
             <a:r>
-              <a:rPr sz="1250" b="0" i="0">
+              <a:rPr sz="1300" b="0" i="0">
                 <a:solidFill>
-                  <a:srgbClr val="E7F0F3"/>
+                  <a:srgbClr val="F2B880"/>
                 </a:solidFill>
                 <a:latin typeface="Arial"/>
               </a:rPr>
-              <a:t>Π is fixed on the boundaries (Π₀ on the driven wall, 0</a:t>
-            </a:r>
-          </a:p>
+              <a:t>Π(z) = Π₀(1 − z/L)</a:t>
+            </a:r>
+          </a:p>
+        </p:txBody>
+      </p:sp>
+      <p:sp>
+        <p:nvSpPr>
+          <p:cNvPr id="45" name="C1-E23 round_rect 43" descr="sci-ppt:o043"/>
+          <p:cNvSpPr/>
+          <p:nvPr/>
+        </p:nvSpPr>
+        <p:spPr>
+          <a:xfrm>
+            <a:off x="8138160" y="1097280"/>
+            <a:ext cx="3703320" cy="4206240"/>
+          </a:xfrm>
+          <a:prstGeom prst="roundRect">
+            <a:avLst/>
+          </a:prstGeom>
+          <a:solidFill>
+            <a:srgbClr val="213E4B"/>
+          </a:solidFill>
+          <a:ln w="20320">
+            <a:solidFill>
+              <a:srgbClr val="8EDBD4"/>
+            </a:solidFill>
+          </a:ln>
+          <a:effectLst/>
+        </p:spPr>
+        <p:txBody>
+          <a:bodyPr rtlCol="0" anchor="ctr"/>
+          <a:lstStyle/>
+          <a:p>
+            <a:pPr algn="ctr"/>
+          </a:p>
+        </p:txBody>
+      </p:sp>
+      <p:sp>
+        <p:nvSpPr>
+          <p:cNvPr id="46" name="C1-E23 text 44" descr="sci-ppt:o044"/>
+          <p:cNvSpPr txBox="1"/>
+          <p:nvPr/>
+        </p:nvSpPr>
+        <p:spPr>
+          <a:xfrm>
+            <a:off x="8247888" y="1152144"/>
+            <a:ext cx="3483863" cy="254889"/>
+          </a:xfrm>
+          <a:prstGeom prst="rect">
+            <a:avLst/>
+          </a:prstGeom>
+          <a:noFill/>
+          <a:effectLst/>
+        </p:spPr>
+        <p:txBody>
+          <a:bodyPr wrap="none" lIns="18288" rIns="18288" tIns="18288" bIns="18288" anchor="t">
+            <a:spAutoFit/>
+          </a:bodyPr>
+          <a:lstStyle/>
           <a:p>
             <a:pPr algn="l">
               <a:spcAft>
@@ -4221,299 +4569,27 @@
               </a:spcAft>
             </a:pPr>
             <a:r>
-              <a:rPr sz="1250" b="0" i="0">
+              <a:rPr sz="1350" b="1" i="0">
                 <a:solidFill>
-                  <a:srgbClr val="E7F0F3"/>
+                  <a:srgbClr val="8EDBD4"/>
                 </a:solidFill>
                 <a:latin typeface="Arial"/>
               </a:rPr>
-              <a:t>at the free surface); the interior follows from geometry</a:t>
-            </a:r>
-          </a:p>
-          <a:p>
-            <a:pPr algn="l">
-              <a:spcAft>
-                <a:spcPts val="0"/>
-              </a:spcAft>
-            </a:pPr>
-            <a:r>
-              <a:rPr sz="1250" b="0" i="0">
-                <a:solidFill>
-                  <a:srgbClr val="E7F0F3"/>
-                </a:solidFill>
-                <a:latin typeface="Arial"/>
-              </a:rPr>
-              <a:t>alone.</a:t>
-            </a:r>
-          </a:p>
-        </p:txBody>
-      </p:sp>
-      <p:sp>
-        <p:nvSpPr>
-          <p:cNvPr id="26" name="C1-E23 ellipse 24" descr="sci-ppt:o024"/>
-          <p:cNvSpPr/>
-          <p:nvPr/>
-        </p:nvSpPr>
-        <p:spPr>
-          <a:xfrm>
-            <a:off x="6890004" y="2044826"/>
-            <a:ext cx="82296" cy="82296"/>
-          </a:xfrm>
-          <a:prstGeom prst="ellipse">
-            <a:avLst/>
-          </a:prstGeom>
-          <a:solidFill>
-            <a:srgbClr val="8EDBD4"/>
-          </a:solidFill>
-          <a:ln w="12700">
-            <a:solidFill>
-              <a:srgbClr val="8EDBD4"/>
-            </a:solidFill>
-          </a:ln>
-          <a:effectLst/>
-        </p:spPr>
-        <p:txBody>
-          <a:bodyPr rtlCol="0" anchor="ctr"/>
-          <a:lstStyle/>
-          <a:p>
-            <a:pPr algn="ctr"/>
-          </a:p>
-        </p:txBody>
-      </p:sp>
-      <p:sp>
-        <p:nvSpPr>
-          <p:cNvPr id="27" name="C1-E23 text 25" descr="sci-ppt:o025"/>
+              <a:t>Straight column</a:t>
+            </a:r>
+          </a:p>
+        </p:txBody>
+      </p:sp>
+      <p:sp>
+        <p:nvSpPr>
+          <p:cNvPr id="47" name="C1-E23 text 45" descr="sci-ppt:o045"/>
           <p:cNvSpPr txBox="1"/>
           <p:nvPr/>
         </p:nvSpPr>
         <p:spPr>
           <a:xfrm>
-            <a:off x="7059168" y="2660014"/>
-            <a:ext cx="4736592" cy="626745"/>
-          </a:xfrm>
-          <a:prstGeom prst="rect">
-            <a:avLst/>
-          </a:prstGeom>
-          <a:noFill/>
-          <a:effectLst/>
-        </p:spPr>
-        <p:txBody>
-          <a:bodyPr wrap="none" lIns="18288" rIns="18288" tIns="18288" bIns="18288" anchor="t">
-            <a:spAutoFit/>
-          </a:bodyPr>
-          <a:lstStyle/>
-          <a:p>
-            <a:pPr algn="l">
-              <a:spcAft>
-                <a:spcPts val="0"/>
-              </a:spcAft>
-            </a:pPr>
-            <a:r>
-              <a:rPr sz="1250" b="0" i="0">
-                <a:solidFill>
-                  <a:srgbClr val="E7F0F3"/>
-                </a:solidFill>
-                <a:latin typeface="Arial"/>
-              </a:rPr>
-              <a:t>Here Π = Π₀(1 − θ/θ₀) in a right-angle corner is</a:t>
-            </a:r>
-          </a:p>
-          <a:p>
-            <a:pPr algn="l">
-              <a:spcAft>
-                <a:spcPts val="0"/>
-              </a:spcAft>
-            </a:pPr>
-            <a:r>
-              <a:rPr sz="1250" b="0" i="0">
-                <a:solidFill>
-                  <a:srgbClr val="E7F0F3"/>
-                </a:solidFill>
-                <a:latin typeface="Arial"/>
-              </a:rPr>
-              <a:t>harmonic, so Δu points along circular arcs toward the</a:t>
-            </a:r>
-          </a:p>
-          <a:p>
-            <a:pPr algn="l">
-              <a:spcAft>
-                <a:spcPts val="0"/>
-              </a:spcAft>
-            </a:pPr>
-            <a:r>
-              <a:rPr sz="1250" b="0" i="0">
-                <a:solidFill>
-                  <a:srgbClr val="E7F0F3"/>
-                </a:solidFill>
-                <a:latin typeface="Arial"/>
-              </a:rPr>
-              <a:t>free side.</a:t>
-            </a:r>
-          </a:p>
-        </p:txBody>
-      </p:sp>
-      <p:sp>
-        <p:nvSpPr>
-          <p:cNvPr id="28" name="C1-E23 ellipse 26" descr="sci-ppt:o026"/>
-          <p:cNvSpPr/>
-          <p:nvPr/>
-        </p:nvSpPr>
-        <p:spPr>
-          <a:xfrm>
-            <a:off x="6890004" y="2717291"/>
-            <a:ext cx="82296" cy="82296"/>
-          </a:xfrm>
-          <a:prstGeom prst="ellipse">
-            <a:avLst/>
-          </a:prstGeom>
-          <a:solidFill>
-            <a:srgbClr val="8EDBD4"/>
-          </a:solidFill>
-          <a:ln w="12700">
-            <a:solidFill>
-              <a:srgbClr val="8EDBD4"/>
-            </a:solidFill>
-          </a:ln>
-          <a:effectLst/>
-        </p:spPr>
-        <p:txBody>
-          <a:bodyPr rtlCol="0" anchor="ctr"/>
-          <a:lstStyle/>
-          <a:p>
-            <a:pPr algn="ctr"/>
-          </a:p>
-        </p:txBody>
-      </p:sp>
-      <p:sp>
-        <p:nvSpPr>
-          <p:cNvPr id="29" name="C1-E23 text 27" descr="sci-ppt:o027"/>
-          <p:cNvSpPr txBox="1"/>
-          <p:nvPr/>
-        </p:nvSpPr>
-        <p:spPr>
-          <a:xfrm>
-            <a:off x="7059168" y="3332479"/>
-            <a:ext cx="4736592" cy="433070"/>
-          </a:xfrm>
-          <a:prstGeom prst="rect">
-            <a:avLst/>
-          </a:prstGeom>
-          <a:noFill/>
-          <a:effectLst/>
-        </p:spPr>
-        <p:txBody>
-          <a:bodyPr wrap="none" lIns="18288" rIns="18288" tIns="18288" bIns="18288" anchor="t">
-            <a:spAutoFit/>
-          </a:bodyPr>
-          <a:lstStyle/>
-          <a:p>
-            <a:pPr algn="l">
-              <a:spcAft>
-                <a:spcPts val="0"/>
-              </a:spcAft>
-            </a:pPr>
-            <a:r>
-              <a:rPr sz="1250" b="0" i="0">
-                <a:solidFill>
-                  <a:srgbClr val="E7F0F3"/>
-                </a:solidFill>
-                <a:latin typeface="Arial"/>
-              </a:rPr>
-              <a:t>Arrow length ∝ 1/r: the impulse gradient is steepest</a:t>
-            </a:r>
-          </a:p>
-          <a:p>
-            <a:pPr algn="l">
-              <a:spcAft>
-                <a:spcPts val="0"/>
-              </a:spcAft>
-            </a:pPr>
-            <a:r>
-              <a:rPr sz="1250" b="0" i="0">
-                <a:solidFill>
-                  <a:srgbClr val="E7F0F3"/>
-                </a:solidFill>
-                <a:latin typeface="Arial"/>
-              </a:rPr>
-              <a:t>near the corner.</a:t>
-            </a:r>
-          </a:p>
-        </p:txBody>
-      </p:sp>
-      <p:sp>
-        <p:nvSpPr>
-          <p:cNvPr id="30" name="C1-E23 ellipse 28" descr="sci-ppt:o028"/>
-          <p:cNvSpPr/>
-          <p:nvPr/>
-        </p:nvSpPr>
-        <p:spPr>
-          <a:xfrm>
-            <a:off x="6890004" y="3389756"/>
-            <a:ext cx="82296" cy="82296"/>
-          </a:xfrm>
-          <a:prstGeom prst="ellipse">
-            <a:avLst/>
-          </a:prstGeom>
-          <a:solidFill>
-            <a:srgbClr val="8EDBD4"/>
-          </a:solidFill>
-          <a:ln w="12700">
-            <a:solidFill>
-              <a:srgbClr val="8EDBD4"/>
-            </a:solidFill>
-          </a:ln>
-          <a:effectLst/>
-        </p:spPr>
-        <p:txBody>
-          <a:bodyPr rtlCol="0" anchor="ctr"/>
-          <a:lstStyle/>
-          <a:p>
-            <a:pPr algn="ctr"/>
-          </a:p>
-        </p:txBody>
-      </p:sp>
-      <p:sp>
-        <p:nvSpPr>
-          <p:cNvPr id="31" name="C1-E23 round_rect 29" descr="sci-ppt:o029"/>
-          <p:cNvSpPr/>
-          <p:nvPr/>
-        </p:nvSpPr>
-        <p:spPr>
-          <a:xfrm>
-            <a:off x="6858000" y="4572000"/>
-            <a:ext cx="4937760" cy="1600200"/>
-          </a:xfrm>
-          <a:prstGeom prst="roundRect">
-            <a:avLst/>
-          </a:prstGeom>
-          <a:solidFill>
-            <a:srgbClr val="213E4B"/>
-          </a:solidFill>
-          <a:ln w="20320">
-            <a:solidFill>
-              <a:srgbClr val="B4C7D2"/>
-            </a:solidFill>
-          </a:ln>
-          <a:effectLst/>
-        </p:spPr>
-        <p:txBody>
-          <a:bodyPr rtlCol="0" anchor="ctr"/>
-          <a:lstStyle/>
-          <a:p>
-            <a:pPr algn="ctr"/>
-          </a:p>
-        </p:txBody>
-      </p:sp>
-      <p:sp>
-        <p:nvSpPr>
-          <p:cNvPr id="32" name="C1-E23 text 30" descr="sci-ppt:o030"/>
-          <p:cNvSpPr txBox="1"/>
-          <p:nvPr/>
-        </p:nvSpPr>
-        <p:spPr>
-          <a:xfrm>
-            <a:off x="6995160" y="4636008"/>
-            <a:ext cx="4663440" cy="247142"/>
+            <a:off x="8275320" y="1554480"/>
+            <a:ext cx="3474720" cy="448563"/>
           </a:xfrm>
           <a:prstGeom prst="rect">
             <a:avLst/>
@@ -4539,33 +4615,9 @@
                 </a:solidFill>
                 <a:latin typeface="Arial"/>
               </a:rPr>
-              <a:t>Conditions: Uτ/L ≪ 1 and ντ/L² ≪ 1.</a:t>
-            </a:r>
-          </a:p>
-        </p:txBody>
-      </p:sp>
-      <p:sp>
-        <p:nvSpPr>
-          <p:cNvPr id="33" name="C1-E23 text 31" descr="sci-ppt:o031"/>
-          <p:cNvSpPr txBox="1"/>
-          <p:nvPr/>
-        </p:nvSpPr>
-        <p:spPr>
-          <a:xfrm>
-            <a:off x="6995160" y="5029200"/>
-            <a:ext cx="4663440" cy="626745"/>
-          </a:xfrm>
-          <a:prstGeom prst="rect">
-            <a:avLst/>
-          </a:prstGeom>
-          <a:noFill/>
-          <a:effectLst/>
-        </p:spPr>
-        <p:txBody>
-          <a:bodyPr wrap="none" lIns="18288" rIns="18288" tIns="18288" bIns="18288" anchor="t">
-            <a:spAutoFit/>
-          </a:bodyPr>
-          <a:lstStyle/>
+              <a:t>d²Π/dz² = 0</a:t>
+            </a:r>
+          </a:p>
           <a:p>
             <a:pPr algn="l">
               <a:spcAft>
@@ -4573,15 +4625,175 @@
               </a:spcAft>
             </a:pPr>
             <a:r>
-              <a:rPr sz="1250" b="0" i="0">
+              <a:rPr sz="1300" b="1" i="0">
+                <a:solidFill>
+                  <a:srgbClr val="E7F0F3"/>
+                </a:solidFill>
+                <a:latin typeface="Arial"/>
+              </a:rPr>
+              <a:t>Π = Π₀ (1 − z/L)</a:t>
+            </a:r>
+          </a:p>
+        </p:txBody>
+      </p:sp>
+      <p:sp>
+        <p:nvSpPr>
+          <p:cNvPr id="48" name="C1-E23 text 46" descr="sci-ppt:o046"/>
+          <p:cNvSpPr txBox="1"/>
+          <p:nvPr/>
+        </p:nvSpPr>
+        <p:spPr>
+          <a:xfrm>
+            <a:off x="8275320" y="2331720"/>
+            <a:ext cx="3474720" cy="247142"/>
+          </a:xfrm>
+          <a:prstGeom prst="rect">
+            <a:avLst/>
+          </a:prstGeom>
+          <a:noFill/>
+          <a:effectLst/>
+        </p:spPr>
+        <p:txBody>
+          <a:bodyPr wrap="none" lIns="18288" rIns="18288" tIns="18288" bIns="18288" anchor="t">
+            <a:spAutoFit/>
+          </a:bodyPr>
+          <a:lstStyle/>
+          <a:p>
+            <a:pPr algn="l">
+              <a:spcAft>
+                <a:spcPts val="0"/>
+              </a:spcAft>
+            </a:pPr>
+            <a:r>
+              <a:rPr sz="1300" b="1" i="0">
+                <a:solidFill>
+                  <a:srgbClr val="8EDBD4"/>
+                </a:solidFill>
+                <a:latin typeface="Arial"/>
+              </a:rPr>
+              <a:t>Δu_z = −(1/ρ) dΠ/dz = Π₀ / (ρL)</a:t>
+            </a:r>
+          </a:p>
+        </p:txBody>
+      </p:sp>
+      <p:sp>
+        <p:nvSpPr>
+          <p:cNvPr id="49" name="C1-E23 text 47" descr="sci-ppt:o047"/>
+          <p:cNvSpPr txBox="1"/>
+          <p:nvPr/>
+        </p:nvSpPr>
+        <p:spPr>
+          <a:xfrm>
+            <a:off x="8275320" y="2926080"/>
+            <a:ext cx="3474720" cy="417576"/>
+          </a:xfrm>
+          <a:prstGeom prst="rect">
+            <a:avLst/>
+          </a:prstGeom>
+          <a:noFill/>
+          <a:effectLst/>
+        </p:spPr>
+        <p:txBody>
+          <a:bodyPr wrap="none" lIns="18288" rIns="18288" tIns="18288" bIns="18288" anchor="t">
+            <a:spAutoFit/>
+          </a:bodyPr>
+          <a:lstStyle/>
+          <a:p>
+            <a:pPr algn="l">
+              <a:spcAft>
+                <a:spcPts val="0"/>
+              </a:spcAft>
+            </a:pPr>
+            <a:r>
+              <a:rPr sz="1200" b="0" i="0">
+                <a:solidFill>
+                  <a:srgbClr val="E7F0F3"/>
+                </a:solidFill>
+                <a:latin typeface="Arial"/>
+              </a:rPr>
+              <a:t>With Π₀ = 0.30 Pa·s, ρ = 1000 kg/m³, L =</a:t>
+            </a:r>
+          </a:p>
+          <a:p>
+            <a:pPr algn="l">
+              <a:spcAft>
+                <a:spcPts val="0"/>
+              </a:spcAft>
+            </a:pPr>
+            <a:r>
+              <a:rPr sz="1200" b="0" i="0">
+                <a:solidFill>
+                  <a:srgbClr val="E7F0F3"/>
+                </a:solidFill>
+                <a:latin typeface="Arial"/>
+              </a:rPr>
+              <a:t>100 µm:</a:t>
+            </a:r>
+          </a:p>
+        </p:txBody>
+      </p:sp>
+      <p:sp>
+        <p:nvSpPr>
+          <p:cNvPr id="50" name="C1-E23 text 48" descr="sci-ppt:o048"/>
+          <p:cNvSpPr txBox="1"/>
+          <p:nvPr/>
+        </p:nvSpPr>
+        <p:spPr>
+          <a:xfrm>
+            <a:off x="8275320" y="3429000"/>
+            <a:ext cx="3474720" cy="309117"/>
+          </a:xfrm>
+          <a:prstGeom prst="rect">
+            <a:avLst/>
+          </a:prstGeom>
+          <a:noFill/>
+          <a:effectLst/>
+        </p:spPr>
+        <p:txBody>
+          <a:bodyPr wrap="none" lIns="18288" rIns="18288" tIns="18288" bIns="18288" anchor="t">
+            <a:spAutoFit/>
+          </a:bodyPr>
+          <a:lstStyle/>
+          <a:p>
+            <a:pPr algn="l">
+              <a:spcAft>
+                <a:spcPts val="0"/>
+              </a:spcAft>
+            </a:pPr>
+            <a:r>
+              <a:rPr sz="1700" b="1" i="0">
                 <a:solidFill>
                   <a:srgbClr val="F2B880"/>
                 </a:solidFill>
                 <a:latin typeface="Arial"/>
               </a:rPr>
-              <a:t>Result: the velocity right after the pulse depends on</a:t>
-            </a:r>
-          </a:p>
+              <a:t>Δu_z = 3.0 m/s</a:t>
+            </a:r>
+          </a:p>
+        </p:txBody>
+      </p:sp>
+      <p:sp>
+        <p:nvSpPr>
+          <p:cNvPr id="51" name="C1-E23 text 49" descr="sci-ppt:o049"/>
+          <p:cNvSpPr txBox="1"/>
+          <p:nvPr/>
+        </p:nvSpPr>
+        <p:spPr>
+          <a:xfrm>
+            <a:off x="8275320" y="4023360"/>
+            <a:ext cx="3474720" cy="603504"/>
+          </a:xfrm>
+          <a:prstGeom prst="rect">
+            <a:avLst/>
+          </a:prstGeom>
+          <a:noFill/>
+          <a:effectLst/>
+        </p:spPr>
+        <p:txBody>
+          <a:bodyPr wrap="none" lIns="18288" rIns="18288" tIns="18288" bIns="18288" anchor="t">
+            <a:spAutoFit/>
+          </a:bodyPr>
+          <a:lstStyle/>
           <a:p>
             <a:pPr algn="l">
               <a:spcAft>
@@ -4589,13 +4801,13 @@
               </a:spcAft>
             </a:pPr>
             <a:r>
-              <a:rPr sz="1250" b="0" i="0">
+              <a:rPr sz="1200" b="0" i="0">
                 <a:solidFill>
-                  <a:srgbClr val="F2B880"/>
+                  <a:srgbClr val="B4C7D2"/>
                 </a:solidFill>
                 <a:latin typeface="Arial"/>
               </a:rPr>
-              <a:t>the shape of the liquid region, not on a detailed</a:t>
+              <a:t>The impulse drops linearly, so every slice</a:t>
             </a:r>
           </a:p>
           <a:p>
@@ -4605,20 +4817,76 @@
               </a:spcAft>
             </a:pPr>
             <a:r>
-              <a:rPr sz="1250" b="0" i="0">
+              <a:rPr sz="1200" b="0" i="0">
                 <a:solidFill>
-                  <a:srgbClr val="F2B880"/>
+                  <a:srgbClr val="B4C7D2"/>
                 </a:solidFill>
                 <a:latin typeface="Arial"/>
               </a:rPr>
-              <a:t>pressure history.</a:t>
-            </a:r>
-          </a:p>
-        </p:txBody>
-      </p:sp>
-      <p:sp>
-        <p:nvSpPr>
-          <p:cNvPr id="34" name="C1-E23 text 32" descr="sci-ppt:o032"/>
+              <a:t>gets the same velocity change toward the</a:t>
+            </a:r>
+          </a:p>
+          <a:p>
+            <a:pPr algn="l">
+              <a:spcAft>
+                <a:spcPts val="0"/>
+              </a:spcAft>
+            </a:pPr>
+            <a:r>
+              <a:rPr sz="1200" b="0" i="0">
+                <a:solidFill>
+                  <a:srgbClr val="B4C7D2"/>
+                </a:solidFill>
+                <a:latin typeface="Arial"/>
+              </a:rPr>
+              <a:t>outlet.</a:t>
+            </a:r>
+          </a:p>
+        </p:txBody>
+      </p:sp>
+      <p:sp>
+        <p:nvSpPr>
+          <p:cNvPr id="52" name="C1-E23 text 50" descr="sci-ppt:o050"/>
+          <p:cNvSpPr txBox="1"/>
+          <p:nvPr/>
+        </p:nvSpPr>
+        <p:spPr>
+          <a:xfrm>
+            <a:off x="457200" y="5669280"/>
+            <a:ext cx="11338560" cy="254889"/>
+          </a:xfrm>
+          <a:prstGeom prst="rect">
+            <a:avLst/>
+          </a:prstGeom>
+          <a:noFill/>
+          <a:effectLst/>
+        </p:spPr>
+        <p:txBody>
+          <a:bodyPr wrap="none" lIns="18288" rIns="18288" tIns="18288" bIns="18288" anchor="t">
+            <a:spAutoFit/>
+          </a:bodyPr>
+          <a:lstStyle/>
+          <a:p>
+            <a:pPr algn="l">
+              <a:spcAft>
+                <a:spcPts val="0"/>
+              </a:spcAft>
+            </a:pPr>
+            <a:r>
+              <a:rPr sz="1350" b="0" i="0">
+                <a:solidFill>
+                  <a:srgbClr val="E7F0F3"/>
+                </a:solidFill>
+                <a:latin typeface="Arial"/>
+              </a:rPr>
+              <a:t>A constant gradient means uniform acceleration: the whole column leaves the driven end as one plug.</a:t>
+            </a:r>
+          </a:p>
+        </p:txBody>
+      </p:sp>
+      <p:sp>
+        <p:nvSpPr>
+          <p:cNvPr id="53" name="C1-E23 text 51" descr="sci-ppt:o051"/>
           <p:cNvSpPr txBox="1"/>
           <p:nvPr/>
         </p:nvSpPr>
@@ -4651,7 +4919,7 @@
                 </a:solidFill>
                 <a:latin typeface="Arial"/>
               </a:rPr>
-              <a:t>Corner example: an exact harmonic solution chosen to show the geometry dependence; not a model of the laser event.</a:t>
+              <a:t>Boundary values Π(0) = Π₀, Π(L) = 0 (Eq. C1-E23).</a:t>
             </a:r>
           </a:p>
         </p:txBody>
